--- a/навыки публичных выступлений/Питч СменаPRO.pptx
+++ b/навыки публичных выступлений/Питч СменаPRO.pptx
@@ -116,6 +116,11 @@
     <p:ext uri="{EFAFB233-063F-42B5-8137-9DF3F51BA10A}">
       <p15:sldGuideLst xmlns:p15="http://schemas.microsoft.com/office/powerpoint/2012/main">
         <p15:guide id="1" pos="3840" userDrawn="1">
+          <p15:clr>
+            <a:srgbClr val="A4A3A4"/>
+          </p15:clr>
+        </p15:guide>
+        <p15:guide id="2" orient="horz" pos="2160">
           <p15:clr>
             <a:srgbClr val="A4A3A4"/>
           </p15:clr>
@@ -1005,34 +1010,14 @@
               </a:lnSpc>
             </a:pPr>
             <a:r>
-              <a:rPr lang="en-US" sz="3300" b="1" noProof="1">
+              <a:rPr lang="ru-RU" sz="3300" b="1" noProof="1">
                 <a:solidFill>
                   <a:srgbClr val="F7F5F0"/>
                 </a:solidFill>
                 <a:latin typeface="Inter" panose="02000503000000020004" pitchFamily="2" charset="0"/>
                 <a:ea typeface="Inter" panose="02000503000000020004" pitchFamily="2" charset="0"/>
               </a:rPr>
-              <a:t>Пилот снизил переработки с 14% до 6% ФОТ. </a:t>
-            </a:r>
-            <a:r>
-              <a:rPr lang="ru-RU" sz="3300" b="1" noProof="1">
-                <a:solidFill>
-                  <a:srgbClr val="F7F5F0"/>
-                </a:solidFill>
-                <a:latin typeface="Inter" panose="02000503000000020004" pitchFamily="2" charset="0"/>
-                <a:ea typeface="Inter" panose="02000503000000020004" pitchFamily="2" charset="0"/>
-              </a:rPr>
-              <a:t>Можно масштабировать </a:t>
-            </a:r>
-            <a:r>
-              <a:rPr lang="en-US" sz="3300" b="1" noProof="1">
-                <a:solidFill>
-                  <a:srgbClr val="F7F5F0"/>
-                </a:solidFill>
-                <a:latin typeface="Inter" panose="02000503000000020004" pitchFamily="2" charset="0"/>
-                <a:ea typeface="Inter" panose="02000503000000020004" pitchFamily="2" charset="0"/>
-              </a:rPr>
-              <a:t>на все 40 точек</a:t>
+              <a:t>Один час вместо одного дня. Как три точки начали экономить 80 тысяч рублей в месяц, и как превратить это в 2,1 миллиона в квартал</a:t>
             </a:r>
             <a:endParaRPr lang="en-US" sz="3300" noProof="1">
               <a:latin typeface="Inter" panose="02000503000000020004" pitchFamily="2" charset="0"/>
@@ -1666,7 +1651,7 @@
                 <a:latin typeface="Inter" panose="02000503000000020004" pitchFamily="2" charset="0"/>
                 <a:ea typeface="Inter" panose="02000503000000020004" pitchFamily="2" charset="0"/>
               </a:rPr>
-              <a:t>Сеть годами платит за переработки и теряет людей</a:t>
+              <a:t>Сеть годами платит за переработки и теряет </a:t>
             </a:r>
             <a:r>
               <a:rPr lang="ru-RU" sz="1500" noProof="1">
@@ -1676,8 +1661,59 @@
                 <a:latin typeface="Inter" panose="02000503000000020004" pitchFamily="2" charset="0"/>
                 <a:ea typeface="Inter" panose="02000503000000020004" pitchFamily="2" charset="0"/>
               </a:rPr>
+              <a:t>обученных </a:t>
+            </a:r>
+            <a:r>
+              <a:rPr lang="en-US" sz="1500" noProof="1">
+                <a:solidFill>
+                  <a:srgbClr val="1E2A2E"/>
+                </a:solidFill>
+                <a:latin typeface="Inter" panose="02000503000000020004" pitchFamily="2" charset="0"/>
+                <a:ea typeface="Inter" panose="02000503000000020004" pitchFamily="2" charset="0"/>
+              </a:rPr>
+              <a:t>людей</a:t>
+            </a:r>
+            <a:r>
+              <a:rPr lang="ru-RU" sz="1500" noProof="1">
+                <a:solidFill>
+                  <a:srgbClr val="1E2A2E"/>
+                </a:solidFill>
+                <a:latin typeface="Inter" panose="02000503000000020004" pitchFamily="2" charset="0"/>
+                <a:ea typeface="Inter" panose="02000503000000020004" pitchFamily="2" charset="0"/>
+              </a:rPr>
               <a:t>.</a:t>
             </a:r>
+          </a:p>
+          <a:p>
+            <a:pPr>
+              <a:lnSpc>
+                <a:spcPct val="145000"/>
+              </a:lnSpc>
+            </a:pPr>
+            <a:endParaRPr lang="ru-RU" sz="1500" noProof="1">
+              <a:solidFill>
+                <a:srgbClr val="1E2A2E"/>
+              </a:solidFill>
+              <a:latin typeface="Inter" panose="02000503000000020004" pitchFamily="2" charset="0"/>
+              <a:ea typeface="Inter" panose="02000503000000020004" pitchFamily="2" charset="0"/>
+            </a:endParaRPr>
+          </a:p>
+          <a:p>
+            <a:pPr>
+              <a:lnSpc>
+                <a:spcPct val="145000"/>
+              </a:lnSpc>
+            </a:pPr>
+            <a:r>
+              <a:rPr lang="ru-RU" sz="1500" noProof="1">
+                <a:solidFill>
+                  <a:srgbClr val="1E2A2E"/>
+                </a:solidFill>
+                <a:latin typeface="Inter" panose="02000503000000020004" pitchFamily="2" charset="0"/>
+                <a:ea typeface="Inter" panose="02000503000000020004" pitchFamily="2" charset="0"/>
+              </a:rPr>
+              <a:t>В прошлом квартале </a:t>
+            </a:r>
             <a:r>
               <a:rPr lang="en-US" sz="1500" noProof="1">
                 <a:solidFill>
@@ -1686,7 +1722,7 @@
                 <a:latin typeface="Inter" panose="02000503000000020004" pitchFamily="2" charset="0"/>
                 <a:ea typeface="Inter" panose="02000503000000020004" pitchFamily="2" charset="0"/>
               </a:rPr>
-              <a:t> </a:t>
+              <a:t>мы запустили модуль автопланирования смен на тр</a:t>
             </a:r>
             <a:r>
               <a:rPr lang="ru-RU" sz="1500" noProof="1">
@@ -1696,7 +1732,7 @@
                 <a:latin typeface="Inter" panose="02000503000000020004" pitchFamily="2" charset="0"/>
                 <a:ea typeface="Inter" panose="02000503000000020004" pitchFamily="2" charset="0"/>
               </a:rPr>
-              <a:t>Ж</a:t>
+              <a:t>е</a:t>
             </a:r>
             <a:r>
               <a:rPr lang="en-US" sz="1500" noProof="1">
@@ -1706,22 +1742,18 @@
                 <a:latin typeface="Inter" panose="02000503000000020004" pitchFamily="2" charset="0"/>
                 <a:ea typeface="Inter" panose="02000503000000020004" pitchFamily="2" charset="0"/>
               </a:rPr>
-              <a:t>алобы на переработки и текучесть – одна из главных претензий клиента к текущему процессу планирования.</a:t>
-            </a:r>
-            <a:endParaRPr lang="en-US" sz="1500" noProof="1">
-              <a:latin typeface="Inter" panose="02000503000000020004" pitchFamily="2" charset="0"/>
-              <a:ea typeface="Inter" panose="02000503000000020004" pitchFamily="2" charset="0"/>
-            </a:endParaRPr>
-          </a:p>
-          <a:p>
-            <a:pPr>
-              <a:lnSpc>
-                <a:spcPct val="145000"/>
-              </a:lnSpc>
-              <a:spcBef>
-                <a:spcPts val="1400"/>
-              </a:spcBef>
-            </a:pPr>
+              <a:t>х точках. Пилот заверш</a:t>
+            </a:r>
+            <a:r>
+              <a:rPr lang="ru-RU" sz="1500" noProof="1">
+                <a:solidFill>
+                  <a:srgbClr val="1E2A2E"/>
+                </a:solidFill>
+                <a:latin typeface="Inter" panose="02000503000000020004" pitchFamily="2" charset="0"/>
+                <a:ea typeface="Inter" panose="02000503000000020004" pitchFamily="2" charset="0"/>
+              </a:rPr>
+              <a:t>е</a:t>
+            </a:r>
             <a:r>
               <a:rPr lang="en-US" sz="1500" noProof="1">
                 <a:solidFill>
@@ -1730,7 +1762,7 @@
                 <a:latin typeface="Inter" panose="02000503000000020004" pitchFamily="2" charset="0"/>
                 <a:ea typeface="Inter" panose="02000503000000020004" pitchFamily="2" charset="0"/>
               </a:rPr>
-              <a:t>Квартал назад мы запустили модуль автопланирования смен на тр</a:t>
+              <a:t>н</a:t>
             </a:r>
             <a:r>
               <a:rPr lang="ru-RU" sz="1500" noProof="1">
@@ -1740,7 +1772,7 @@
                 <a:latin typeface="Inter" panose="02000503000000020004" pitchFamily="2" charset="0"/>
                 <a:ea typeface="Inter" panose="02000503000000020004" pitchFamily="2" charset="0"/>
               </a:rPr>
-              <a:t>е</a:t>
+              <a:t>, </a:t>
             </a:r>
             <a:r>
               <a:rPr lang="en-US" sz="1500" noProof="1">
@@ -1750,7 +1782,7 @@
                 <a:latin typeface="Inter" panose="02000503000000020004" pitchFamily="2" charset="0"/>
                 <a:ea typeface="Inter" panose="02000503000000020004" pitchFamily="2" charset="0"/>
               </a:rPr>
-              <a:t>х точках. Пилот заверш</a:t>
+              <a:t>и сегодня </a:t>
             </a:r>
             <a:r>
               <a:rPr lang="ru-RU" sz="1500" noProof="1">
@@ -1760,7 +1792,7 @@
                 <a:latin typeface="Inter" panose="02000503000000020004" pitchFamily="2" charset="0"/>
                 <a:ea typeface="Inter" panose="02000503000000020004" pitchFamily="2" charset="0"/>
               </a:rPr>
-              <a:t>е</a:t>
+              <a:t>мы должны решить, масштабировать</a:t>
             </a:r>
             <a:r>
               <a:rPr lang="en-US" sz="1500" noProof="1">
@@ -1770,7 +1802,7 @@
                 <a:latin typeface="Inter" panose="02000503000000020004" pitchFamily="2" charset="0"/>
                 <a:ea typeface="Inter" panose="02000503000000020004" pitchFamily="2" charset="0"/>
               </a:rPr>
-              <a:t>н</a:t>
+              <a:t> ли </a:t>
             </a:r>
             <a:r>
               <a:rPr lang="ru-RU" sz="1500" noProof="1">
@@ -1780,7 +1812,7 @@
                 <a:latin typeface="Inter" panose="02000503000000020004" pitchFamily="2" charset="0"/>
                 <a:ea typeface="Inter" panose="02000503000000020004" pitchFamily="2" charset="0"/>
               </a:rPr>
-              <a:t>, </a:t>
+              <a:t>модуль дальше</a:t>
             </a:r>
             <a:r>
               <a:rPr lang="en-US" sz="1500" noProof="1">
@@ -1790,47 +1822,7 @@
                 <a:latin typeface="Inter" panose="02000503000000020004" pitchFamily="2" charset="0"/>
                 <a:ea typeface="Inter" panose="02000503000000020004" pitchFamily="2" charset="0"/>
               </a:rPr>
-              <a:t>и сегодня </a:t>
-            </a:r>
-            <a:r>
-              <a:rPr lang="ru-RU" sz="1500" noProof="1">
-                <a:solidFill>
-                  <a:srgbClr val="1E2A2E"/>
-                </a:solidFill>
-                <a:latin typeface="Inter" panose="02000503000000020004" pitchFamily="2" charset="0"/>
-                <a:ea typeface="Inter" panose="02000503000000020004" pitchFamily="2" charset="0"/>
-              </a:rPr>
-              <a:t>мы </a:t>
-            </a:r>
-            <a:r>
-              <a:rPr lang="en-US" sz="1500" noProof="1">
-                <a:solidFill>
-                  <a:srgbClr val="1E2A2E"/>
-                </a:solidFill>
-                <a:latin typeface="Inter" panose="02000503000000020004" pitchFamily="2" charset="0"/>
-                <a:ea typeface="Inter" panose="02000503000000020004" pitchFamily="2" charset="0"/>
-              </a:rPr>
-              <a:t>решаем, </a:t>
-            </a:r>
-            <a:r>
-              <a:rPr lang="ru-RU" sz="1500" noProof="1">
-                <a:solidFill>
-                  <a:srgbClr val="1E2A2E"/>
-                </a:solidFill>
-                <a:latin typeface="Inter" panose="02000503000000020004" pitchFamily="2" charset="0"/>
-                <a:ea typeface="Inter" panose="02000503000000020004" pitchFamily="2" charset="0"/>
-              </a:rPr>
-              <a:t>масштабировать</a:t>
-            </a:r>
-            <a:r>
-              <a:rPr lang="en-US" sz="1500" noProof="1">
-                <a:solidFill>
-                  <a:srgbClr val="1E2A2E"/>
-                </a:solidFill>
-                <a:latin typeface="Inter" panose="02000503000000020004" pitchFamily="2" charset="0"/>
-                <a:ea typeface="Inter" panose="02000503000000020004" pitchFamily="2" charset="0"/>
-              </a:rPr>
-              <a:t> ли модуль на всю сеть.</a:t>
+              <a:t>.</a:t>
             </a:r>
             <a:endParaRPr lang="en-US" sz="1500" noProof="1">
               <a:latin typeface="Inter" panose="02000503000000020004" pitchFamily="2" charset="0"/>
@@ -1920,7 +1912,17 @@
                 <a:latin typeface="Inter" panose="02000503000000020004" pitchFamily="2" charset="0"/>
                 <a:ea typeface="Inter" panose="02000503000000020004" pitchFamily="2" charset="0"/>
               </a:rPr>
-              <a:t>2 / 10</a:t>
+              <a:t>2 / </a:t>
+            </a:r>
+            <a:r>
+              <a:rPr lang="ru-RU" sz="1000" noProof="1">
+                <a:solidFill>
+                  <a:srgbClr val="6B767B"/>
+                </a:solidFill>
+                <a:latin typeface="Inter" panose="02000503000000020004" pitchFamily="2" charset="0"/>
+                <a:ea typeface="Inter" panose="02000503000000020004" pitchFamily="2" charset="0"/>
+              </a:rPr>
+              <a:t>9</a:t>
             </a:r>
             <a:endParaRPr lang="en-US" sz="1000" noProof="1">
               <a:latin typeface="Inter" panose="02000503000000020004" pitchFamily="2" charset="0"/>
@@ -2567,7 +2569,17 @@
                 <a:latin typeface="Inter" panose="02000503000000020004" pitchFamily="2" charset="0"/>
                 <a:ea typeface="Inter" panose="02000503000000020004" pitchFamily="2" charset="0"/>
               </a:rPr>
-              <a:t>3 / 10</a:t>
+              <a:t>3 / </a:t>
+            </a:r>
+            <a:r>
+              <a:rPr lang="ru-RU" sz="1000" noProof="1">
+                <a:solidFill>
+                  <a:srgbClr val="6B767B"/>
+                </a:solidFill>
+                <a:latin typeface="Inter" panose="02000503000000020004" pitchFamily="2" charset="0"/>
+                <a:ea typeface="Inter" panose="02000503000000020004" pitchFamily="2" charset="0"/>
+              </a:rPr>
+              <a:t>9</a:t>
             </a:r>
             <a:endParaRPr lang="en-US" sz="1000" noProof="1">
               <a:latin typeface="Inter" panose="02000503000000020004" pitchFamily="2" charset="0"/>
@@ -3001,7 +3013,17 @@
                 <a:latin typeface="Inter" panose="02000503000000020004" pitchFamily="2" charset="0"/>
                 <a:ea typeface="Inter" panose="02000503000000020004" pitchFamily="2" charset="0"/>
               </a:rPr>
-              <a:t>4 / 10</a:t>
+              <a:t>4 / </a:t>
+            </a:r>
+            <a:r>
+              <a:rPr lang="ru-RU" sz="1000" noProof="1">
+                <a:solidFill>
+                  <a:srgbClr val="6B767B"/>
+                </a:solidFill>
+                <a:latin typeface="Inter" panose="02000503000000020004" pitchFamily="2" charset="0"/>
+                <a:ea typeface="Inter" panose="02000503000000020004" pitchFamily="2" charset="0"/>
+              </a:rPr>
+              <a:t>9</a:t>
             </a:r>
             <a:endParaRPr lang="en-US" sz="1000" noProof="1">
               <a:latin typeface="Inter" panose="02000503000000020004" pitchFamily="2" charset="0"/>
@@ -3320,7 +3342,7 @@
           <p:nvPr>
             <p:extLst>
               <p:ext uri="{F5677B7D-0D2A-4D9B-9A5C-6D8D7D0E5A5D}">
-                <pptd:icon xmlns="" xmlns:a14="http://schemas.microsoft.com/office/drawing/2010/main" xmlns:c="http://schemas.openxmlformats.org/drawingml/2006/chart" xmlns:cx="http://schemas.microsoft.com/office/drawing/2014/chartex" xmlns:m="http://schemas.openxmlformats.org/officeDocument/2006/math" xmlns:mc="http://schemas.openxmlformats.org/markup-compatibility/2006" xmlns:pptd="https://kimi-design.msh.team/pptd/2026" encoding="base64url">eyJpY29uTmFtZSI6ImZhczpjYWxlbmRhci1jaGVjayJ9</pptd:icon>
+                <pptd:icon xmlns:pptd="https://kimi-design.msh.team/pptd/2026" xmlns:mc="http://schemas.openxmlformats.org/markup-compatibility/2006" xmlns:m="http://schemas.openxmlformats.org/officeDocument/2006/math" xmlns:cx="http://schemas.microsoft.com/office/drawing/2014/chartex" xmlns:c="http://schemas.openxmlformats.org/drawingml/2006/chart" xmlns:a14="http://schemas.microsoft.com/office/drawing/2010/main" xmlns="" encoding="base64url">eyJpY29uTmFtZSI6ImZhczpjYWxlbmRhci1jaGVjayJ9</pptd:icon>
               </p:ext>
             </p:extLst>
           </p:nvPr>
@@ -3587,7 +3609,7 @@
           <p:nvPr>
             <p:extLst>
               <p:ext uri="{F5677B7D-0D2A-4D9B-9A5C-6D8D7D0E5A5D}">
-                <pptd:icon xmlns="" xmlns:a14="http://schemas.microsoft.com/office/drawing/2010/main" xmlns:c="http://schemas.openxmlformats.org/drawingml/2006/chart" xmlns:cx="http://schemas.microsoft.com/office/drawing/2014/chartex" xmlns:m="http://schemas.openxmlformats.org/officeDocument/2006/math" xmlns:mc="http://schemas.openxmlformats.org/markup-compatibility/2006" xmlns:pptd="https://kimi-design.msh.team/pptd/2026" encoding="base64url">eyJpY29uTmFtZSI6ImZhczp1c2VyLWNoZWNrIn0</pptd:icon>
+                <pptd:icon xmlns:pptd="https://kimi-design.msh.team/pptd/2026" xmlns:mc="http://schemas.openxmlformats.org/markup-compatibility/2006" xmlns:m="http://schemas.openxmlformats.org/officeDocument/2006/math" xmlns:cx="http://schemas.microsoft.com/office/drawing/2014/chartex" xmlns:c="http://schemas.openxmlformats.org/drawingml/2006/chart" xmlns:a14="http://schemas.microsoft.com/office/drawing/2010/main" xmlns="" encoding="base64url">eyJpY29uTmFtZSI6ImZhczp1c2VyLWNoZWNrIn0</pptd:icon>
               </p:ext>
             </p:extLst>
           </p:nvPr>
@@ -3898,7 +3920,7 @@
           <p:nvPr>
             <p:extLst>
               <p:ext uri="{F5677B7D-0D2A-4D9B-9A5C-6D8D7D0E5A5D}">
-                <pptd:icon xmlns="" xmlns:a14="http://schemas.microsoft.com/office/drawing/2010/main" xmlns:c="http://schemas.openxmlformats.org/drawingml/2006/chart" xmlns:cx="http://schemas.microsoft.com/office/drawing/2014/chartex" xmlns:m="http://schemas.openxmlformats.org/officeDocument/2006/math" xmlns:mc="http://schemas.openxmlformats.org/markup-compatibility/2006" xmlns:pptd="https://kimi-design.msh.team/pptd/2026" encoding="base64url">eyJpY29uTmFtZSI6ImZhczpjaGFydC1saW5lIn0</pptd:icon>
+                <pptd:icon xmlns:pptd="https://kimi-design.msh.team/pptd/2026" xmlns:mc="http://schemas.openxmlformats.org/markup-compatibility/2006" xmlns:m="http://schemas.openxmlformats.org/officeDocument/2006/math" xmlns:cx="http://schemas.microsoft.com/office/drawing/2014/chartex" xmlns:c="http://schemas.openxmlformats.org/drawingml/2006/chart" xmlns:a14="http://schemas.microsoft.com/office/drawing/2010/main" xmlns="" encoding="base64url">eyJpY29uTmFtZSI6ImZhczpjaGFydC1saW5lIn0</pptd:icon>
               </p:ext>
             </p:extLst>
           </p:nvPr>
@@ -4167,7 +4189,21 @@
                 <a:latin typeface="Inter" panose="02000503000000020004" pitchFamily="2" charset="0"/>
                 <a:ea typeface="Inter" panose="02000503000000020004" pitchFamily="2" charset="0"/>
               </a:rPr>
-              <a:t>На пилоте внедрение заняло две недели на каждой точке</a:t>
+              <a:t>На пилоте внедрение заняло </a:t>
+            </a:r>
+            <a:r>
+              <a:rPr lang="ru-RU" sz="1400" noProof="1">
+                <a:latin typeface="Inter" panose="02000503000000020004" pitchFamily="2" charset="0"/>
+                <a:ea typeface="Inter" panose="02000503000000020004" pitchFamily="2" charset="0"/>
+              </a:rPr>
+              <a:t>три</a:t>
+            </a:r>
+            <a:r>
+              <a:rPr lang="en-US" sz="1400" noProof="1">
+                <a:latin typeface="Inter" panose="02000503000000020004" pitchFamily="2" charset="0"/>
+                <a:ea typeface="Inter" panose="02000503000000020004" pitchFamily="2" charset="0"/>
+              </a:rPr>
+              <a:t> недели на каждой точке</a:t>
             </a:r>
             <a:r>
               <a:rPr lang="ru-RU" sz="1400" noProof="1">
@@ -4278,7 +4314,17 @@
                 <a:latin typeface="Inter" panose="02000503000000020004" pitchFamily="2" charset="0"/>
                 <a:ea typeface="Inter" panose="02000503000000020004" pitchFamily="2" charset="0"/>
               </a:rPr>
-              <a:t>5 / 10</a:t>
+              <a:t>5 / </a:t>
+            </a:r>
+            <a:r>
+              <a:rPr lang="ru-RU" sz="1000" noProof="1">
+                <a:solidFill>
+                  <a:srgbClr val="6B767B"/>
+                </a:solidFill>
+                <a:latin typeface="Inter" panose="02000503000000020004" pitchFamily="2" charset="0"/>
+                <a:ea typeface="Inter" panose="02000503000000020004" pitchFamily="2" charset="0"/>
+              </a:rPr>
+              <a:t>9</a:t>
             </a:r>
             <a:endParaRPr lang="en-US" sz="1000" noProof="1">
               <a:latin typeface="Inter" panose="02000503000000020004" pitchFamily="2" charset="0"/>
@@ -4747,7 +4793,27 @@
                 <a:latin typeface="Inter" panose="02000503000000020004" pitchFamily="2" charset="0"/>
                 <a:ea typeface="Inter" panose="02000503000000020004" pitchFamily="2" charset="0"/>
               </a:rPr>
-              <a:t>стоимость смен −19%</a:t>
+              <a:t>стоимость смен </a:t>
+            </a:r>
+            <a:r>
+              <a:rPr lang="ru-RU" sz="1300" noProof="1">
+                <a:solidFill>
+                  <a:srgbClr val="1E2A2E"/>
+                </a:solidFill>
+                <a:latin typeface="Inter" panose="02000503000000020004" pitchFamily="2" charset="0"/>
+                <a:ea typeface="Inter" panose="02000503000000020004" pitchFamily="2" charset="0"/>
+              </a:rPr>
+              <a:t>-</a:t>
+            </a:r>
+            <a:r>
+              <a:rPr lang="en-US" sz="1300" noProof="1">
+                <a:solidFill>
+                  <a:srgbClr val="1E2A2E"/>
+                </a:solidFill>
+                <a:latin typeface="Inter" panose="02000503000000020004" pitchFamily="2" charset="0"/>
+                <a:ea typeface="Inter" panose="02000503000000020004" pitchFamily="2" charset="0"/>
+              </a:rPr>
+              <a:t>19%</a:t>
             </a:r>
             <a:endParaRPr lang="en-US" sz="1300" noProof="1">
               <a:latin typeface="Inter" panose="02000503000000020004" pitchFamily="2" charset="0"/>
@@ -4842,7 +4908,27 @@
                 <a:latin typeface="Inter" panose="02000503000000020004" pitchFamily="2" charset="0"/>
                 <a:ea typeface="Inter" panose="02000503000000020004" pitchFamily="2" charset="0"/>
               </a:rPr>
-              <a:t>Сезонный пилот на 5–7 точках</a:t>
+              <a:t>Сезонный пилот на 5</a:t>
+            </a:r>
+            <a:r>
+              <a:rPr lang="ru-RU" sz="1600" b="1" noProof="1">
+                <a:solidFill>
+                  <a:srgbClr val="1E2A2E"/>
+                </a:solidFill>
+                <a:latin typeface="Inter" panose="02000503000000020004" pitchFamily="2" charset="0"/>
+                <a:ea typeface="Inter" panose="02000503000000020004" pitchFamily="2" charset="0"/>
+              </a:rPr>
+              <a:t>-</a:t>
+            </a:r>
+            <a:r>
+              <a:rPr lang="en-US" sz="1600" b="1" noProof="1">
+                <a:solidFill>
+                  <a:srgbClr val="1E2A2E"/>
+                </a:solidFill>
+                <a:latin typeface="Inter" panose="02000503000000020004" pitchFamily="2" charset="0"/>
+                <a:ea typeface="Inter" panose="02000503000000020004" pitchFamily="2" charset="0"/>
+              </a:rPr>
+              <a:t>7 точках</a:t>
             </a:r>
             <a:endParaRPr lang="en-US" sz="1300" noProof="1">
               <a:latin typeface="Inter" panose="02000503000000020004" pitchFamily="2" charset="0"/>
@@ -5141,7 +5227,17 @@
                 <a:latin typeface="Inter" panose="02000503000000020004" pitchFamily="2" charset="0"/>
                 <a:ea typeface="Inter" panose="02000503000000020004" pitchFamily="2" charset="0"/>
               </a:rPr>
-              <a:t>6 / 10</a:t>
+              <a:t>6 / </a:t>
+            </a:r>
+            <a:r>
+              <a:rPr lang="ru-RU" sz="1000" noProof="1">
+                <a:solidFill>
+                  <a:srgbClr val="6B767B"/>
+                </a:solidFill>
+                <a:latin typeface="Inter" panose="02000503000000020004" pitchFamily="2" charset="0"/>
+                <a:ea typeface="Inter" panose="02000503000000020004" pitchFamily="2" charset="0"/>
+              </a:rPr>
+              <a:t>9</a:t>
             </a:r>
             <a:endParaRPr lang="en-US" sz="1000" noProof="1">
               <a:latin typeface="Inter" panose="02000503000000020004" pitchFamily="2" charset="0"/>
@@ -6122,7 +6218,7 @@
         <p:spPr>
           <a:xfrm>
             <a:off x="812800" y="5156200"/>
-            <a:ext cx="3933825" cy="812800"/>
+            <a:ext cx="3933825" cy="269240"/>
           </a:xfrm>
           <a:prstGeom prst="rect">
             <a:avLst/>
@@ -6149,7 +6245,7 @@
                 <a:latin typeface="Inter" panose="02000503000000020004" pitchFamily="2" charset="0"/>
                 <a:ea typeface="Inter" panose="02000503000000020004" pitchFamily="2" charset="0"/>
               </a:rPr>
-              <a:t>Экономия – оценка по результатам пилота.</a:t>
+              <a:t>Экономия – оценка по результатам пилота</a:t>
             </a:r>
             <a:endParaRPr lang="ru-RU" sz="1100" noProof="1">
               <a:solidFill>
@@ -6159,97 +6255,6 @@
               <a:ea typeface="Inter" panose="02000503000000020004" pitchFamily="2" charset="0"/>
             </a:endParaRPr>
           </a:p>
-          <a:p>
-            <a:pPr>
-              <a:lnSpc>
-                <a:spcPct val="135000"/>
-              </a:lnSpc>
-            </a:pPr>
-            <a:r>
-              <a:rPr lang="en-US" sz="1100" noProof="1">
-                <a:solidFill>
-                  <a:srgbClr val="6B767B"/>
-                </a:solidFill>
-                <a:latin typeface="Inter" panose="02000503000000020004" pitchFamily="2" charset="0"/>
-                <a:ea typeface="Inter" panose="02000503000000020004" pitchFamily="2" charset="0"/>
-              </a:rPr>
-              <a:t>Допущения расч</a:t>
-            </a:r>
-            <a:r>
-              <a:rPr lang="ru-RU" sz="1100" noProof="1">
-                <a:solidFill>
-                  <a:srgbClr val="6B767B"/>
-                </a:solidFill>
-                <a:latin typeface="Inter" panose="02000503000000020004" pitchFamily="2" charset="0"/>
-                <a:ea typeface="Inter" panose="02000503000000020004" pitchFamily="2" charset="0"/>
-              </a:rPr>
-              <a:t>е</a:t>
-            </a:r>
-            <a:r>
-              <a:rPr lang="en-US" sz="1100" noProof="1">
-                <a:solidFill>
-                  <a:srgbClr val="6B767B"/>
-                </a:solidFill>
-                <a:latin typeface="Inter" panose="02000503000000020004" pitchFamily="2" charset="0"/>
-                <a:ea typeface="Inter" panose="02000503000000020004" pitchFamily="2" charset="0"/>
-              </a:rPr>
-              <a:t>та </a:t>
-            </a:r>
-            <a:r>
-              <a:rPr lang="ru-RU" sz="1100" noProof="1">
-                <a:solidFill>
-                  <a:srgbClr val="6B767B"/>
-                </a:solidFill>
-                <a:latin typeface="Inter" panose="02000503000000020004" pitchFamily="2" charset="0"/>
-                <a:ea typeface="Inter" panose="02000503000000020004" pitchFamily="2" charset="0"/>
-              </a:rPr>
-              <a:t>представлены</a:t>
-            </a:r>
-            <a:r>
-              <a:rPr lang="en-US" sz="1100" noProof="1">
-                <a:solidFill>
-                  <a:srgbClr val="6B767B"/>
-                </a:solidFill>
-                <a:latin typeface="Inter" panose="02000503000000020004" pitchFamily="2" charset="0"/>
-                <a:ea typeface="Inter" panose="02000503000000020004" pitchFamily="2" charset="0"/>
-              </a:rPr>
-              <a:t> на</a:t>
-            </a:r>
-            <a:r>
-              <a:rPr lang="ru-RU" sz="1100" noProof="1">
-                <a:solidFill>
-                  <a:srgbClr val="6B767B"/>
-                </a:solidFill>
-                <a:latin typeface="Inter" panose="02000503000000020004" pitchFamily="2" charset="0"/>
-                <a:ea typeface="Inter" panose="02000503000000020004" pitchFamily="2" charset="0"/>
-              </a:rPr>
-              <a:t> </a:t>
-            </a:r>
-            <a:r>
-              <a:rPr lang="en-US" sz="1100" noProof="1">
-                <a:solidFill>
-                  <a:srgbClr val="6B767B"/>
-                </a:solidFill>
-                <a:latin typeface="Inter" panose="02000503000000020004" pitchFamily="2" charset="0"/>
-                <a:ea typeface="Inter" panose="02000503000000020004" pitchFamily="2" charset="0"/>
-              </a:rPr>
-              <a:t>10</a:t>
-            </a:r>
-            <a:r>
-              <a:rPr lang="ru-RU" sz="1100" noProof="1">
-                <a:solidFill>
-                  <a:srgbClr val="6B767B"/>
-                </a:solidFill>
-                <a:latin typeface="Inter" panose="02000503000000020004" pitchFamily="2" charset="0"/>
-                <a:ea typeface="Inter" panose="02000503000000020004" pitchFamily="2" charset="0"/>
-              </a:rPr>
-              <a:t> слайде</a:t>
-            </a:r>
-            <a:endParaRPr lang="en-US" sz="1100" noProof="1">
-              <a:latin typeface="Inter" panose="02000503000000020004" pitchFamily="2" charset="0"/>
-              <a:ea typeface="Inter" panose="02000503000000020004" pitchFamily="2" charset="0"/>
-            </a:endParaRPr>
-          </a:p>
         </p:txBody>
       </p:sp>
       <p:sp>
@@ -6333,7 +6338,17 @@
                 <a:latin typeface="Inter" panose="02000503000000020004" pitchFamily="2" charset="0"/>
                 <a:ea typeface="Inter" panose="02000503000000020004" pitchFamily="2" charset="0"/>
               </a:rPr>
-              <a:t>7 / 10</a:t>
+              <a:t>7 / </a:t>
+            </a:r>
+            <a:r>
+              <a:rPr lang="ru-RU" sz="1000" noProof="1">
+                <a:solidFill>
+                  <a:srgbClr val="6B767B"/>
+                </a:solidFill>
+                <a:latin typeface="Inter" panose="02000503000000020004" pitchFamily="2" charset="0"/>
+                <a:ea typeface="Inter" panose="02000503000000020004" pitchFamily="2" charset="0"/>
+              </a:rPr>
+              <a:t>9</a:t>
             </a:r>
             <a:endParaRPr lang="en-US" sz="1000" noProof="1">
               <a:latin typeface="Inter" panose="02000503000000020004" pitchFamily="2" charset="0"/>
@@ -7115,7 +7130,17 @@
                 <a:latin typeface="Inter" panose="02000503000000020004" pitchFamily="2" charset="0"/>
                 <a:ea typeface="Inter" panose="02000503000000020004" pitchFamily="2" charset="0"/>
               </a:rPr>
-              <a:t>8 / 10</a:t>
+              <a:t>8 / </a:t>
+            </a:r>
+            <a:r>
+              <a:rPr lang="ru-RU" sz="1000" noProof="1">
+                <a:solidFill>
+                  <a:srgbClr val="6B767B"/>
+                </a:solidFill>
+                <a:latin typeface="Inter" panose="02000503000000020004" pitchFamily="2" charset="0"/>
+                <a:ea typeface="Inter" panose="02000503000000020004" pitchFamily="2" charset="0"/>
+              </a:rPr>
+              <a:t>9</a:t>
             </a:r>
             <a:endParaRPr lang="en-US" sz="1000" noProof="1">
               <a:latin typeface="Inter" panose="02000503000000020004" pitchFamily="2" charset="0"/>

--- a/навыки публичных выступлений/Питч СменаPRO.pptx
+++ b/навыки публичных выступлений/Питч СменаPRO.pptx
@@ -4,6 +4,9 @@
   <p:sldMasterIdLst>
     <p:sldMasterId id="2147483648" r:id="rId1"/>
   </p:sldMasterIdLst>
+  <p:notesMasterIdLst>
+    <p:notesMasterId r:id="rId11"/>
+  </p:notesMasterIdLst>
   <p:sldIdLst>
     <p:sldId id="256" r:id="rId2"/>
     <p:sldId id="257" r:id="rId3"/>
@@ -134,7 +137,7 @@
 <file path=ppt/charts/chart1.xml><?xml version="1.0" encoding="utf-8"?>
 <c:chartSpace xmlns:c="http://schemas.openxmlformats.org/drawingml/2006/chart" xmlns:a="http://schemas.openxmlformats.org/drawingml/2006/main" xmlns:r="http://schemas.openxmlformats.org/officeDocument/2006/relationships" xmlns:c16r2="http://schemas.microsoft.com/office/drawing/2015/06/chart">
   <c:date1904 val="0"/>
-  <c:lang val="ru-RU"/>
+  <c:lang val="en-GB"/>
   <c:roundedCorners val="1"/>
   <c:style val="2"/>
   <c:chart>
@@ -284,7 +287,7 @@
                     <a:latin typeface="Arial"/>
                   </a:defRPr>
                 </a:pPr>
-                <a:endParaRPr lang="ru-RU"/>
+                <a:endParaRPr lang="en-RU"/>
               </a:p>
             </c:txPr>
             <c:showLegendKey val="0"/>
@@ -388,7 +391,7 @@
                 <a:latin typeface="Arial"/>
               </a:defRPr>
             </a:pPr>
-            <a:endParaRPr lang="ru-RU"/>
+            <a:endParaRPr lang="en-RU"/>
           </a:p>
         </c:txPr>
         <c:crossAx val="2"/>
@@ -436,7 +439,7 @@
                 <a:latin typeface="Arial"/>
               </a:defRPr>
             </a:pPr>
-            <a:endParaRPr lang="ru-RU"/>
+            <a:endParaRPr lang="en-RU"/>
           </a:p>
         </c:txPr>
         <c:crossAx val="1"/>
@@ -469,7 +472,7 @@
 <file path=ppt/charts/chart2.xml><?xml version="1.0" encoding="utf-8"?>
 <c:chartSpace xmlns:c="http://schemas.openxmlformats.org/drawingml/2006/chart" xmlns:a="http://schemas.openxmlformats.org/drawingml/2006/main" xmlns:r="http://schemas.openxmlformats.org/officeDocument/2006/relationships" xmlns:c16r2="http://schemas.microsoft.com/office/drawing/2015/06/chart">
   <c:date1904 val="0"/>
-  <c:lang val="ru-RU"/>
+  <c:lang val="en-GB"/>
   <c:roundedCorners val="1"/>
   <c:style val="2"/>
   <c:chart>
@@ -521,7 +524,7 @@
                     <a:latin typeface="Arial"/>
                   </a:defRPr>
                 </a:pPr>
-                <a:endParaRPr lang="ru-RU"/>
+                <a:endParaRPr lang="en-RU"/>
               </a:p>
             </c:txPr>
             <c:dLblPos val="ctr"/>
@@ -633,7 +636,7 @@
                 <a:latin typeface="Arial"/>
               </a:defRPr>
             </a:pPr>
-            <a:endParaRPr lang="ru-RU"/>
+            <a:endParaRPr lang="en-RU"/>
           </a:p>
         </c:txPr>
         <c:crossAx val="2"/>
@@ -681,7 +684,7 @@
                 <a:latin typeface="Arial"/>
               </a:defRPr>
             </a:pPr>
-            <a:endParaRPr lang="ru-RU"/>
+            <a:endParaRPr lang="en-RU"/>
           </a:p>
         </c:txPr>
         <c:crossAx val="1"/>
@@ -709,6 +712,1324 @@
     <c:autoUpdate val="0"/>
   </c:externalData>
 </c:chartSpace>
+</file>
+
+<file path=ppt/notesMasters/notesMaster1.xml><?xml version="1.0" encoding="utf-8"?>
+<p:notesMaster xmlns:a="http://schemas.openxmlformats.org/drawingml/2006/main" xmlns:r="http://schemas.openxmlformats.org/officeDocument/2006/relationships" xmlns:p="http://schemas.openxmlformats.org/presentationml/2006/main">
+  <p:cSld>
+    <p:bg>
+      <p:bgRef idx="1001">
+        <a:schemeClr val="bg1"/>
+      </p:bgRef>
+    </p:bg>
+    <p:spTree>
+      <p:nvGrpSpPr>
+        <p:cNvPr id="1" name=""/>
+        <p:cNvGrpSpPr/>
+        <p:nvPr/>
+      </p:nvGrpSpPr>
+      <p:grpSpPr>
+        <a:xfrm>
+          <a:off x="0" y="0"/>
+          <a:ext cx="0" cy="0"/>
+          <a:chOff x="0" y="0"/>
+          <a:chExt cx="0" cy="0"/>
+        </a:xfrm>
+      </p:grpSpPr>
+      <p:sp>
+        <p:nvSpPr>
+          <p:cNvPr id="2" name="Header Placeholder 1"/>
+          <p:cNvSpPr>
+            <a:spLocks noGrp="1"/>
+          </p:cNvSpPr>
+          <p:nvPr>
+            <p:ph type="hdr" sz="quarter"/>
+          </p:nvPr>
+        </p:nvSpPr>
+        <p:spPr>
+          <a:xfrm>
+            <a:off x="0" y="0"/>
+            <a:ext cx="5283200" cy="344488"/>
+          </a:xfrm>
+          <a:prstGeom prst="rect">
+            <a:avLst/>
+          </a:prstGeom>
+        </p:spPr>
+        <p:txBody>
+          <a:bodyPr vert="horz" lIns="91440" tIns="45720" rIns="91440" bIns="45720" rtlCol="0"/>
+          <a:lstStyle>
+            <a:lvl1pPr algn="l">
+              <a:defRPr sz="1200"/>
+            </a:lvl1pPr>
+          </a:lstStyle>
+          <a:p>
+            <a:endParaRPr lang="en-RU"/>
+          </a:p>
+        </p:txBody>
+      </p:sp>
+      <p:sp>
+        <p:nvSpPr>
+          <p:cNvPr id="3" name="Date Placeholder 2"/>
+          <p:cNvSpPr>
+            <a:spLocks noGrp="1"/>
+          </p:cNvSpPr>
+          <p:nvPr>
+            <p:ph type="dt" idx="1"/>
+          </p:nvPr>
+        </p:nvSpPr>
+        <p:spPr>
+          <a:xfrm>
+            <a:off x="6905625" y="0"/>
+            <a:ext cx="5283200" cy="344488"/>
+          </a:xfrm>
+          <a:prstGeom prst="rect">
+            <a:avLst/>
+          </a:prstGeom>
+        </p:spPr>
+        <p:txBody>
+          <a:bodyPr vert="horz" lIns="91440" tIns="45720" rIns="91440" bIns="45720" rtlCol="0"/>
+          <a:lstStyle>
+            <a:lvl1pPr algn="r">
+              <a:defRPr sz="1200"/>
+            </a:lvl1pPr>
+          </a:lstStyle>
+          <a:p>
+            <a:fld id="{17EDD583-CC43-1B41-B514-24581CEA9DE2}" type="datetimeFigureOut">
+              <a:rPr lang="en-RU" smtClean="0"/>
+              <a:t>04.10.2026</a:t>
+            </a:fld>
+            <a:endParaRPr lang="en-RU"/>
+          </a:p>
+        </p:txBody>
+      </p:sp>
+      <p:sp>
+        <p:nvSpPr>
+          <p:cNvPr id="4" name="Slide Image Placeholder 3"/>
+          <p:cNvSpPr>
+            <a:spLocks noGrp="1" noRot="1" noChangeAspect="1"/>
+          </p:cNvSpPr>
+          <p:nvPr>
+            <p:ph type="sldImg" idx="2"/>
+          </p:nvPr>
+        </p:nvSpPr>
+        <p:spPr>
+          <a:xfrm>
+            <a:off x="4038600" y="857250"/>
+            <a:ext cx="4114800" cy="2314575"/>
+          </a:xfrm>
+          <a:prstGeom prst="rect">
+            <a:avLst/>
+          </a:prstGeom>
+          <a:noFill/>
+          <a:ln w="12700">
+            <a:solidFill>
+              <a:prstClr val="black"/>
+            </a:solidFill>
+          </a:ln>
+        </p:spPr>
+        <p:txBody>
+          <a:bodyPr vert="horz" lIns="91440" tIns="45720" rIns="91440" bIns="45720" rtlCol="0" anchor="ctr"/>
+          <a:lstStyle/>
+          <a:p>
+            <a:endParaRPr lang="en-RU"/>
+          </a:p>
+        </p:txBody>
+      </p:sp>
+      <p:sp>
+        <p:nvSpPr>
+          <p:cNvPr id="5" name="Notes Placeholder 4"/>
+          <p:cNvSpPr>
+            <a:spLocks noGrp="1"/>
+          </p:cNvSpPr>
+          <p:nvPr>
+            <p:ph type="body" sz="quarter" idx="3"/>
+          </p:nvPr>
+        </p:nvSpPr>
+        <p:spPr>
+          <a:xfrm>
+            <a:off x="1219200" y="3300413"/>
+            <a:ext cx="9753600" cy="2700337"/>
+          </a:xfrm>
+          <a:prstGeom prst="rect">
+            <a:avLst/>
+          </a:prstGeom>
+        </p:spPr>
+        <p:txBody>
+          <a:bodyPr vert="horz" lIns="91440" tIns="45720" rIns="91440" bIns="45720" rtlCol="0"/>
+          <a:lstStyle/>
+          <a:p>
+            <a:pPr lvl="0"/>
+            <a:r>
+              <a:rPr lang="en-GB"/>
+              <a:t>Click to edit Master text styles</a:t>
+            </a:r>
+          </a:p>
+          <a:p>
+            <a:pPr lvl="1"/>
+            <a:r>
+              <a:rPr lang="en-GB"/>
+              <a:t>Second level</a:t>
+            </a:r>
+          </a:p>
+          <a:p>
+            <a:pPr lvl="2"/>
+            <a:r>
+              <a:rPr lang="en-GB"/>
+              <a:t>Third level</a:t>
+            </a:r>
+          </a:p>
+          <a:p>
+            <a:pPr lvl="3"/>
+            <a:r>
+              <a:rPr lang="en-GB"/>
+              <a:t>Fourth level</a:t>
+            </a:r>
+          </a:p>
+          <a:p>
+            <a:pPr lvl="4"/>
+            <a:r>
+              <a:rPr lang="en-GB"/>
+              <a:t>Fifth level</a:t>
+            </a:r>
+            <a:endParaRPr lang="en-RU"/>
+          </a:p>
+        </p:txBody>
+      </p:sp>
+      <p:sp>
+        <p:nvSpPr>
+          <p:cNvPr id="6" name="Footer Placeholder 5"/>
+          <p:cNvSpPr>
+            <a:spLocks noGrp="1"/>
+          </p:cNvSpPr>
+          <p:nvPr>
+            <p:ph type="ftr" sz="quarter" idx="4"/>
+          </p:nvPr>
+        </p:nvSpPr>
+        <p:spPr>
+          <a:xfrm>
+            <a:off x="0" y="6513513"/>
+            <a:ext cx="5283200" cy="344487"/>
+          </a:xfrm>
+          <a:prstGeom prst="rect">
+            <a:avLst/>
+          </a:prstGeom>
+        </p:spPr>
+        <p:txBody>
+          <a:bodyPr vert="horz" lIns="91440" tIns="45720" rIns="91440" bIns="45720" rtlCol="0" anchor="b"/>
+          <a:lstStyle>
+            <a:lvl1pPr algn="l">
+              <a:defRPr sz="1200"/>
+            </a:lvl1pPr>
+          </a:lstStyle>
+          <a:p>
+            <a:endParaRPr lang="en-RU"/>
+          </a:p>
+        </p:txBody>
+      </p:sp>
+      <p:sp>
+        <p:nvSpPr>
+          <p:cNvPr id="7" name="Slide Number Placeholder 6"/>
+          <p:cNvSpPr>
+            <a:spLocks noGrp="1"/>
+          </p:cNvSpPr>
+          <p:nvPr>
+            <p:ph type="sldNum" sz="quarter" idx="5"/>
+          </p:nvPr>
+        </p:nvSpPr>
+        <p:spPr>
+          <a:xfrm>
+            <a:off x="6905625" y="6513513"/>
+            <a:ext cx="5283200" cy="344487"/>
+          </a:xfrm>
+          <a:prstGeom prst="rect">
+            <a:avLst/>
+          </a:prstGeom>
+        </p:spPr>
+        <p:txBody>
+          <a:bodyPr vert="horz" lIns="91440" tIns="45720" rIns="91440" bIns="45720" rtlCol="0" anchor="b"/>
+          <a:lstStyle>
+            <a:lvl1pPr algn="r">
+              <a:defRPr sz="1200"/>
+            </a:lvl1pPr>
+          </a:lstStyle>
+          <a:p>
+            <a:fld id="{EC64C357-1E42-9544-917F-BF79F3E6876F}" type="slidenum">
+              <a:rPr lang="en-RU" smtClean="0"/>
+              <a:t>‹#›</a:t>
+            </a:fld>
+            <a:endParaRPr lang="en-RU"/>
+          </a:p>
+        </p:txBody>
+      </p:sp>
+    </p:spTree>
+    <p:extLst>
+      <p:ext uri="{BB962C8B-B14F-4D97-AF65-F5344CB8AC3E}">
+        <p14:creationId xmlns:p14="http://schemas.microsoft.com/office/powerpoint/2010/main" val="534123490"/>
+      </p:ext>
+    </p:extLst>
+  </p:cSld>
+  <p:clrMap bg1="lt1" tx1="dk1" bg2="lt2" tx2="dk2" accent1="accent1" accent2="accent2" accent3="accent3" accent4="accent4" accent5="accent5" accent6="accent6" hlink="hlink" folHlink="folHlink"/>
+  <p:notesStyle>
+    <a:lvl1pPr marL="0" algn="l" defTabSz="914400" rtl="0" eaLnBrk="1" latinLnBrk="0" hangingPunct="1">
+      <a:defRPr sz="1200" kern="1200">
+        <a:solidFill>
+          <a:schemeClr val="tx1"/>
+        </a:solidFill>
+        <a:latin typeface="+mn-lt"/>
+        <a:ea typeface="+mn-ea"/>
+        <a:cs typeface="+mn-cs"/>
+      </a:defRPr>
+    </a:lvl1pPr>
+    <a:lvl2pPr marL="457200" algn="l" defTabSz="914400" rtl="0" eaLnBrk="1" latinLnBrk="0" hangingPunct="1">
+      <a:defRPr sz="1200" kern="1200">
+        <a:solidFill>
+          <a:schemeClr val="tx1"/>
+        </a:solidFill>
+        <a:latin typeface="+mn-lt"/>
+        <a:ea typeface="+mn-ea"/>
+        <a:cs typeface="+mn-cs"/>
+      </a:defRPr>
+    </a:lvl2pPr>
+    <a:lvl3pPr marL="914400" algn="l" defTabSz="914400" rtl="0" eaLnBrk="1" latinLnBrk="0" hangingPunct="1">
+      <a:defRPr sz="1200" kern="1200">
+        <a:solidFill>
+          <a:schemeClr val="tx1"/>
+        </a:solidFill>
+        <a:latin typeface="+mn-lt"/>
+        <a:ea typeface="+mn-ea"/>
+        <a:cs typeface="+mn-cs"/>
+      </a:defRPr>
+    </a:lvl3pPr>
+    <a:lvl4pPr marL="1371600" algn="l" defTabSz="914400" rtl="0" eaLnBrk="1" latinLnBrk="0" hangingPunct="1">
+      <a:defRPr sz="1200" kern="1200">
+        <a:solidFill>
+          <a:schemeClr val="tx1"/>
+        </a:solidFill>
+        <a:latin typeface="+mn-lt"/>
+        <a:ea typeface="+mn-ea"/>
+        <a:cs typeface="+mn-cs"/>
+      </a:defRPr>
+    </a:lvl4pPr>
+    <a:lvl5pPr marL="1828800" algn="l" defTabSz="914400" rtl="0" eaLnBrk="1" latinLnBrk="0" hangingPunct="1">
+      <a:defRPr sz="1200" kern="1200">
+        <a:solidFill>
+          <a:schemeClr val="tx1"/>
+        </a:solidFill>
+        <a:latin typeface="+mn-lt"/>
+        <a:ea typeface="+mn-ea"/>
+        <a:cs typeface="+mn-cs"/>
+      </a:defRPr>
+    </a:lvl5pPr>
+    <a:lvl6pPr marL="2286000" algn="l" defTabSz="914400" rtl="0" eaLnBrk="1" latinLnBrk="0" hangingPunct="1">
+      <a:defRPr sz="1200" kern="1200">
+        <a:solidFill>
+          <a:schemeClr val="tx1"/>
+        </a:solidFill>
+        <a:latin typeface="+mn-lt"/>
+        <a:ea typeface="+mn-ea"/>
+        <a:cs typeface="+mn-cs"/>
+      </a:defRPr>
+    </a:lvl6pPr>
+    <a:lvl7pPr marL="2743200" algn="l" defTabSz="914400" rtl="0" eaLnBrk="1" latinLnBrk="0" hangingPunct="1">
+      <a:defRPr sz="1200" kern="1200">
+        <a:solidFill>
+          <a:schemeClr val="tx1"/>
+        </a:solidFill>
+        <a:latin typeface="+mn-lt"/>
+        <a:ea typeface="+mn-ea"/>
+        <a:cs typeface="+mn-cs"/>
+      </a:defRPr>
+    </a:lvl7pPr>
+    <a:lvl8pPr marL="3200400" algn="l" defTabSz="914400" rtl="0" eaLnBrk="1" latinLnBrk="0" hangingPunct="1">
+      <a:defRPr sz="1200" kern="1200">
+        <a:solidFill>
+          <a:schemeClr val="tx1"/>
+        </a:solidFill>
+        <a:latin typeface="+mn-lt"/>
+        <a:ea typeface="+mn-ea"/>
+        <a:cs typeface="+mn-cs"/>
+      </a:defRPr>
+    </a:lvl8pPr>
+    <a:lvl9pPr marL="3657600" algn="l" defTabSz="914400" rtl="0" eaLnBrk="1" latinLnBrk="0" hangingPunct="1">
+      <a:defRPr sz="1200" kern="1200">
+        <a:solidFill>
+          <a:schemeClr val="tx1"/>
+        </a:solidFill>
+        <a:latin typeface="+mn-lt"/>
+        <a:ea typeface="+mn-ea"/>
+        <a:cs typeface="+mn-cs"/>
+      </a:defRPr>
+    </a:lvl9pPr>
+  </p:notesStyle>
+</p:notesMaster>
+</file>
+
+<file path=ppt/notesSlides/notesSlide1.xml><?xml version="1.0" encoding="utf-8"?>
+<p:notes xmlns:a="http://schemas.openxmlformats.org/drawingml/2006/main" xmlns:r="http://schemas.openxmlformats.org/officeDocument/2006/relationships" xmlns:p="http://schemas.openxmlformats.org/presentationml/2006/main">
+  <p:cSld>
+    <p:spTree>
+      <p:nvGrpSpPr>
+        <p:cNvPr id="1" name=""/>
+        <p:cNvGrpSpPr/>
+        <p:nvPr/>
+      </p:nvGrpSpPr>
+      <p:grpSpPr>
+        <a:xfrm>
+          <a:off x="0" y="0"/>
+          <a:ext cx="0" cy="0"/>
+          <a:chOff x="0" y="0"/>
+          <a:chExt cx="0" cy="0"/>
+        </a:xfrm>
+      </p:grpSpPr>
+      <p:sp>
+        <p:nvSpPr>
+          <p:cNvPr id="2" name="Slide Image Placeholder 1"/>
+          <p:cNvSpPr>
+            <a:spLocks noGrp="1" noRot="1" noChangeAspect="1"/>
+          </p:cNvSpPr>
+          <p:nvPr>
+            <p:ph type="sldImg"/>
+          </p:nvPr>
+        </p:nvSpPr>
+        <p:spPr/>
+      </p:sp>
+      <p:sp>
+        <p:nvSpPr>
+          <p:cNvPr id="3" name="Notes Placeholder 2"/>
+          <p:cNvSpPr>
+            <a:spLocks noGrp="1"/>
+          </p:cNvSpPr>
+          <p:nvPr>
+            <p:ph type="body" idx="1"/>
+          </p:nvPr>
+        </p:nvSpPr>
+        <p:spPr/>
+        <p:txBody>
+          <a:bodyPr/>
+          <a:lstStyle/>
+          <a:p>
+            <a:pPr marL="0" marR="0" lvl="0" indent="0" algn="l" defTabSz="914400" rtl="0" eaLnBrk="1" fontAlgn="auto" latinLnBrk="0" hangingPunct="1">
+              <a:lnSpc>
+                <a:spcPct val="100000"/>
+              </a:lnSpc>
+              <a:spcBef>
+                <a:spcPts val="0"/>
+              </a:spcBef>
+              <a:spcAft>
+                <a:spcPts val="0"/>
+              </a:spcAft>
+              <a:buClrTx/>
+              <a:buSzTx/>
+              <a:buFontTx/>
+              <a:buNone/>
+              <a:tabLst/>
+              <a:defRPr/>
+            </a:pPr>
+            <a:r>
+              <a:rPr lang="ru-RU" dirty="0"/>
+              <a:t>Здравствуйте, коллеги. Меня зовут Софья, я </a:t>
+            </a:r>
+            <a:r>
+              <a:rPr lang="ru-RU" dirty="0" err="1"/>
+              <a:t>продакт</a:t>
+            </a:r>
+            <a:r>
+              <a:rPr lang="ru-RU" dirty="0"/>
+              <a:t>-менеджер компании "Смена</a:t>
+            </a:r>
+            <a:r>
+              <a:rPr lang="en-GB" dirty="0"/>
+              <a:t>PRO". </a:t>
+            </a:r>
+            <a:r>
+              <a:rPr lang="ru-RU" dirty="0"/>
+              <a:t>Пять минут – и я покажу, как бригадиры теперь тратят один час на составление графиков вместо одного дня, как три точки начали экономить 80 тысяч рублей в месяц, и как превратить это в 2 миллиона в квартал.</a:t>
+            </a:r>
+          </a:p>
+        </p:txBody>
+      </p:sp>
+      <p:sp>
+        <p:nvSpPr>
+          <p:cNvPr id="4" name="Slide Number Placeholder 3"/>
+          <p:cNvSpPr>
+            <a:spLocks noGrp="1"/>
+          </p:cNvSpPr>
+          <p:nvPr>
+            <p:ph type="sldNum" sz="quarter" idx="5"/>
+          </p:nvPr>
+        </p:nvSpPr>
+        <p:spPr/>
+        <p:txBody>
+          <a:bodyPr/>
+          <a:lstStyle/>
+          <a:p>
+            <a:fld id="{EC64C357-1E42-9544-917F-BF79F3E6876F}" type="slidenum">
+              <a:rPr lang="en-RU" smtClean="0"/>
+              <a:t>1</a:t>
+            </a:fld>
+            <a:endParaRPr lang="en-RU"/>
+          </a:p>
+        </p:txBody>
+      </p:sp>
+    </p:spTree>
+    <p:extLst>
+      <p:ext uri="{BB962C8B-B14F-4D97-AF65-F5344CB8AC3E}">
+        <p14:creationId xmlns:p14="http://schemas.microsoft.com/office/powerpoint/2010/main" val="3614243501"/>
+      </p:ext>
+    </p:extLst>
+  </p:cSld>
+  <p:clrMapOvr>
+    <a:masterClrMapping/>
+  </p:clrMapOvr>
+</p:notes>
+</file>
+
+<file path=ppt/notesSlides/notesSlide2.xml><?xml version="1.0" encoding="utf-8"?>
+<p:notes xmlns:a="http://schemas.openxmlformats.org/drawingml/2006/main" xmlns:r="http://schemas.openxmlformats.org/officeDocument/2006/relationships" xmlns:p="http://schemas.openxmlformats.org/presentationml/2006/main">
+  <p:cSld>
+    <p:spTree>
+      <p:nvGrpSpPr>
+        <p:cNvPr id="1" name=""/>
+        <p:cNvGrpSpPr/>
+        <p:nvPr/>
+      </p:nvGrpSpPr>
+      <p:grpSpPr>
+        <a:xfrm>
+          <a:off x="0" y="0"/>
+          <a:ext cx="0" cy="0"/>
+          <a:chOff x="0" y="0"/>
+          <a:chExt cx="0" cy="0"/>
+        </a:xfrm>
+      </p:grpSpPr>
+      <p:sp>
+        <p:nvSpPr>
+          <p:cNvPr id="2" name="Slide Image Placeholder 1"/>
+          <p:cNvSpPr>
+            <a:spLocks noGrp="1" noRot="1" noChangeAspect="1"/>
+          </p:cNvSpPr>
+          <p:nvPr>
+            <p:ph type="sldImg"/>
+          </p:nvPr>
+        </p:nvSpPr>
+        <p:spPr/>
+      </p:sp>
+      <p:sp>
+        <p:nvSpPr>
+          <p:cNvPr id="3" name="Notes Placeholder 2"/>
+          <p:cNvSpPr>
+            <a:spLocks noGrp="1"/>
+          </p:cNvSpPr>
+          <p:nvPr>
+            <p:ph type="body" idx="1"/>
+          </p:nvPr>
+        </p:nvSpPr>
+        <p:spPr/>
+        <p:txBody>
+          <a:bodyPr/>
+          <a:lstStyle/>
+          <a:p>
+            <a:pPr marL="0" marR="0" lvl="0" indent="0" algn="l" defTabSz="914400" rtl="0" eaLnBrk="1" fontAlgn="auto" latinLnBrk="0" hangingPunct="1">
+              <a:lnSpc>
+                <a:spcPct val="100000"/>
+              </a:lnSpc>
+              <a:spcBef>
+                <a:spcPts val="0"/>
+              </a:spcBef>
+              <a:spcAft>
+                <a:spcPts val="0"/>
+              </a:spcAft>
+              <a:buClrTx/>
+              <a:buSzTx/>
+              <a:buFontTx/>
+              <a:buNone/>
+              <a:tabLst/>
+              <a:defRPr/>
+            </a:pPr>
+            <a:r>
+              <a:rPr lang="ru-RU" dirty="0"/>
+              <a:t>С каких данных начался наш пилотный проект? Переработки в среднем по 14% ФОТ, недовольные сотрудники уходят. (пауза 2 сек.) На каждой точке, каждую неделю бригадир тратил целый рабочий день на то, чтобы собрать график смен вручную, а не руководить командой. Обученные люди увольняются, а компания платит больше денег из-за переработок.</a:t>
+            </a:r>
+          </a:p>
+          <a:p>
+            <a:endParaRPr lang="en-RU" dirty="0"/>
+          </a:p>
+          <a:p>
+            <a:endParaRPr lang="en-RU" dirty="0"/>
+          </a:p>
+        </p:txBody>
+      </p:sp>
+      <p:sp>
+        <p:nvSpPr>
+          <p:cNvPr id="4" name="Slide Number Placeholder 3"/>
+          <p:cNvSpPr>
+            <a:spLocks noGrp="1"/>
+          </p:cNvSpPr>
+          <p:nvPr>
+            <p:ph type="sldNum" sz="quarter" idx="5"/>
+          </p:nvPr>
+        </p:nvSpPr>
+        <p:spPr/>
+        <p:txBody>
+          <a:bodyPr/>
+          <a:lstStyle/>
+          <a:p>
+            <a:fld id="{EC64C357-1E42-9544-917F-BF79F3E6876F}" type="slidenum">
+              <a:rPr lang="en-RU" smtClean="0"/>
+              <a:t>2</a:t>
+            </a:fld>
+            <a:endParaRPr lang="en-RU"/>
+          </a:p>
+        </p:txBody>
+      </p:sp>
+    </p:spTree>
+    <p:extLst>
+      <p:ext uri="{BB962C8B-B14F-4D97-AF65-F5344CB8AC3E}">
+        <p14:creationId xmlns:p14="http://schemas.microsoft.com/office/powerpoint/2010/main" val="2347202148"/>
+      </p:ext>
+    </p:extLst>
+  </p:cSld>
+  <p:clrMapOvr>
+    <a:masterClrMapping/>
+  </p:clrMapOvr>
+</p:notes>
+</file>
+
+<file path=ppt/notesSlides/notesSlide3.xml><?xml version="1.0" encoding="utf-8"?>
+<p:notes xmlns:a="http://schemas.openxmlformats.org/drawingml/2006/main" xmlns:r="http://schemas.openxmlformats.org/officeDocument/2006/relationships" xmlns:p="http://schemas.openxmlformats.org/presentationml/2006/main">
+  <p:cSld>
+    <p:spTree>
+      <p:nvGrpSpPr>
+        <p:cNvPr id="1" name=""/>
+        <p:cNvGrpSpPr/>
+        <p:nvPr/>
+      </p:nvGrpSpPr>
+      <p:grpSpPr>
+        <a:xfrm>
+          <a:off x="0" y="0"/>
+          <a:ext cx="0" cy="0"/>
+          <a:chOff x="0" y="0"/>
+          <a:chExt cx="0" cy="0"/>
+        </a:xfrm>
+      </p:grpSpPr>
+      <p:sp>
+        <p:nvSpPr>
+          <p:cNvPr id="2" name="Slide Image Placeholder 1"/>
+          <p:cNvSpPr>
+            <a:spLocks noGrp="1" noRot="1" noChangeAspect="1"/>
+          </p:cNvSpPr>
+          <p:nvPr>
+            <p:ph type="sldImg"/>
+          </p:nvPr>
+        </p:nvSpPr>
+        <p:spPr/>
+      </p:sp>
+      <p:sp>
+        <p:nvSpPr>
+          <p:cNvPr id="3" name="Notes Placeholder 2"/>
+          <p:cNvSpPr>
+            <a:spLocks noGrp="1"/>
+          </p:cNvSpPr>
+          <p:nvPr>
+            <p:ph type="body" idx="1"/>
+          </p:nvPr>
+        </p:nvSpPr>
+        <p:spPr/>
+        <p:txBody>
+          <a:bodyPr/>
+          <a:lstStyle/>
+          <a:p>
+            <a:r>
+              <a:rPr lang="ru-RU" dirty="0"/>
+              <a:t>Герой этой истории – не модуль, а ваши бригадиры. Бригадир пришел в профессию руководить людьми: ставить задачи, держать сервис, развивать команду. А вместо этого каждую неделю вручную пытался запланировать график как можно точнее и все равно становился главным источником конфликтов с командой: смены неудобные, пожелания не учтены, уступки и разборки.</a:t>
+            </a:r>
+          </a:p>
+          <a:p>
+            <a:r>
+              <a:rPr lang="ru-RU" dirty="0"/>
+              <a:t>Ставка была простая: если </a:t>
+            </a:r>
+            <a:r>
+              <a:rPr lang="ru-RU" dirty="0" err="1"/>
+              <a:t>автопланирование</a:t>
+            </a:r>
+            <a:r>
+              <a:rPr lang="ru-RU" dirty="0"/>
+              <a:t> не снимет с бригадиров эту нагрузку и не покажет деньги за квартал, то затраты на внедрение модуля не окупятся. Для этого мы провели пилотное внедрение, измеряя главные метрики.</a:t>
+            </a:r>
+          </a:p>
+          <a:p>
+            <a:endParaRPr lang="en-RU" dirty="0"/>
+          </a:p>
+          <a:p>
+            <a:r>
+              <a:rPr lang="en-RU" dirty="0"/>
+              <a:t>---</a:t>
+            </a:r>
+          </a:p>
+          <a:p>
+            <a:endParaRPr lang="en-RU" dirty="0"/>
+          </a:p>
+          <a:p>
+            <a:r>
+              <a:rPr lang="ru-RU" dirty="0"/>
+              <a:t>По словам работников, "Впервые график смен стал собираться за час, а не за день". Вместо рутинного планирования и конфликтов с подчиненными бригадир теперь может потратить почти целый рабочий день на другие задачи.</a:t>
+            </a:r>
+            <a:endParaRPr lang="en-RU" dirty="0"/>
+          </a:p>
+        </p:txBody>
+      </p:sp>
+      <p:sp>
+        <p:nvSpPr>
+          <p:cNvPr id="4" name="Slide Number Placeholder 3"/>
+          <p:cNvSpPr>
+            <a:spLocks noGrp="1"/>
+          </p:cNvSpPr>
+          <p:nvPr>
+            <p:ph type="sldNum" sz="quarter" idx="5"/>
+          </p:nvPr>
+        </p:nvSpPr>
+        <p:spPr/>
+        <p:txBody>
+          <a:bodyPr/>
+          <a:lstStyle/>
+          <a:p>
+            <a:fld id="{EC64C357-1E42-9544-917F-BF79F3E6876F}" type="slidenum">
+              <a:rPr lang="en-RU" smtClean="0"/>
+              <a:t>3</a:t>
+            </a:fld>
+            <a:endParaRPr lang="en-RU"/>
+          </a:p>
+        </p:txBody>
+      </p:sp>
+    </p:spTree>
+    <p:extLst>
+      <p:ext uri="{BB962C8B-B14F-4D97-AF65-F5344CB8AC3E}">
+        <p14:creationId xmlns:p14="http://schemas.microsoft.com/office/powerpoint/2010/main" val="1454164211"/>
+      </p:ext>
+    </p:extLst>
+  </p:cSld>
+  <p:clrMapOvr>
+    <a:masterClrMapping/>
+  </p:clrMapOvr>
+</p:notes>
+</file>
+
+<file path=ppt/notesSlides/notesSlide4.xml><?xml version="1.0" encoding="utf-8"?>
+<p:notes xmlns:a="http://schemas.openxmlformats.org/drawingml/2006/main" xmlns:r="http://schemas.openxmlformats.org/officeDocument/2006/relationships" xmlns:p="http://schemas.openxmlformats.org/presentationml/2006/main">
+  <p:cSld>
+    <p:spTree>
+      <p:nvGrpSpPr>
+        <p:cNvPr id="1" name=""/>
+        <p:cNvGrpSpPr/>
+        <p:nvPr/>
+      </p:nvGrpSpPr>
+      <p:grpSpPr>
+        <a:xfrm>
+          <a:off x="0" y="0"/>
+          <a:ext cx="0" cy="0"/>
+          <a:chOff x="0" y="0"/>
+          <a:chExt cx="0" cy="0"/>
+        </a:xfrm>
+      </p:grpSpPr>
+      <p:sp>
+        <p:nvSpPr>
+          <p:cNvPr id="2" name="Slide Image Placeholder 1"/>
+          <p:cNvSpPr>
+            <a:spLocks noGrp="1" noRot="1" noChangeAspect="1"/>
+          </p:cNvSpPr>
+          <p:nvPr>
+            <p:ph type="sldImg"/>
+          </p:nvPr>
+        </p:nvSpPr>
+        <p:spPr/>
+      </p:sp>
+      <p:sp>
+        <p:nvSpPr>
+          <p:cNvPr id="3" name="Notes Placeholder 2"/>
+          <p:cNvSpPr>
+            <a:spLocks noGrp="1"/>
+          </p:cNvSpPr>
+          <p:nvPr>
+            <p:ph type="body" idx="1"/>
+          </p:nvPr>
+        </p:nvSpPr>
+        <p:spPr/>
+        <p:txBody>
+          <a:bodyPr/>
+          <a:lstStyle/>
+          <a:p>
+            <a:r>
+              <a:rPr lang="ru-RU" dirty="0"/>
+              <a:t>Пилот показал положительные результаты: доля переработок снижается на 2-3 процента каждый месяц. На графике справа показана стоимость смен на тех же точках: уже сейчас компания тратит на 80 тысяч рублей в месяц меньше, чем до пилотного внедрения. И даже текучесть снизилась с 38 до 27 процентов - сотрудники теперь более довольны своей работой. </a:t>
+            </a:r>
+          </a:p>
+          <a:p>
+            <a:r>
+              <a:rPr lang="ru-RU" dirty="0"/>
+              <a:t>А теперь вернемся к нашему бригадиру и его дню. По словам работников, "Впервые график смен стал собираться за час, а не за день". Вместо рутинного планирования и конфликтов с подчиненными бригадир теперь может потратить почти целый рабочий день на другие задачи.</a:t>
+            </a:r>
+          </a:p>
+          <a:p>
+            <a:endParaRPr lang="en-RU" dirty="0"/>
+          </a:p>
+        </p:txBody>
+      </p:sp>
+      <p:sp>
+        <p:nvSpPr>
+          <p:cNvPr id="4" name="Slide Number Placeholder 3"/>
+          <p:cNvSpPr>
+            <a:spLocks noGrp="1"/>
+          </p:cNvSpPr>
+          <p:nvPr>
+            <p:ph type="sldNum" sz="quarter" idx="5"/>
+          </p:nvPr>
+        </p:nvSpPr>
+        <p:spPr/>
+        <p:txBody>
+          <a:bodyPr/>
+          <a:lstStyle/>
+          <a:p>
+            <a:fld id="{EC64C357-1E42-9544-917F-BF79F3E6876F}" type="slidenum">
+              <a:rPr lang="en-RU" smtClean="0"/>
+              <a:t>4</a:t>
+            </a:fld>
+            <a:endParaRPr lang="en-RU"/>
+          </a:p>
+        </p:txBody>
+      </p:sp>
+    </p:spTree>
+    <p:extLst>
+      <p:ext uri="{BB962C8B-B14F-4D97-AF65-F5344CB8AC3E}">
+        <p14:creationId xmlns:p14="http://schemas.microsoft.com/office/powerpoint/2010/main" val="454742897"/>
+      </p:ext>
+    </p:extLst>
+  </p:cSld>
+  <p:clrMapOvr>
+    <a:masterClrMapping/>
+  </p:clrMapOvr>
+</p:notes>
+</file>
+
+<file path=ppt/notesSlides/notesSlide5.xml><?xml version="1.0" encoding="utf-8"?>
+<p:notes xmlns:a="http://schemas.openxmlformats.org/drawingml/2006/main" xmlns:r="http://schemas.openxmlformats.org/officeDocument/2006/relationships" xmlns:p="http://schemas.openxmlformats.org/presentationml/2006/main">
+  <p:cSld>
+    <p:spTree>
+      <p:nvGrpSpPr>
+        <p:cNvPr id="1" name=""/>
+        <p:cNvGrpSpPr/>
+        <p:nvPr/>
+      </p:nvGrpSpPr>
+      <p:grpSpPr>
+        <a:xfrm>
+          <a:off x="0" y="0"/>
+          <a:ext cx="0" cy="0"/>
+          <a:chOff x="0" y="0"/>
+          <a:chExt cx="0" cy="0"/>
+        </a:xfrm>
+      </p:grpSpPr>
+      <p:sp>
+        <p:nvSpPr>
+          <p:cNvPr id="2" name="Slide Image Placeholder 1"/>
+          <p:cNvSpPr>
+            <a:spLocks noGrp="1" noRot="1" noChangeAspect="1"/>
+          </p:cNvSpPr>
+          <p:nvPr>
+            <p:ph type="sldImg"/>
+          </p:nvPr>
+        </p:nvSpPr>
+        <p:spPr/>
+      </p:sp>
+      <p:sp>
+        <p:nvSpPr>
+          <p:cNvPr id="3" name="Notes Placeholder 2"/>
+          <p:cNvSpPr>
+            <a:spLocks noGrp="1"/>
+          </p:cNvSpPr>
+          <p:nvPr>
+            <p:ph type="body" idx="1"/>
+          </p:nvPr>
+        </p:nvSpPr>
+        <p:spPr/>
+        <p:txBody>
+          <a:bodyPr/>
+          <a:lstStyle/>
+          <a:p>
+            <a:r>
+              <a:rPr lang="ru-RU" dirty="0"/>
+              <a:t>Рассмотрим, как устроено решение, которое это дает.</a:t>
+            </a:r>
+          </a:p>
+          <a:p>
+            <a:r>
+              <a:rPr lang="ru-RU" dirty="0"/>
+              <a:t>Модуль делает три вещи. Первое: собирает график автоматически под загрузку, нормы часов и пожелания сотрудников. Второе: контролирует переработки. Они не появляются "по факту месяца", а видны в моменте. Третье: оставляет бригадиру возможность править готовый график. Автоматика не убирает человека из процесса, а снимает с него рутину, оставляя возможность принимать решение.</a:t>
+            </a:r>
+          </a:p>
+        </p:txBody>
+      </p:sp>
+      <p:sp>
+        <p:nvSpPr>
+          <p:cNvPr id="4" name="Slide Number Placeholder 3"/>
+          <p:cNvSpPr>
+            <a:spLocks noGrp="1"/>
+          </p:cNvSpPr>
+          <p:nvPr>
+            <p:ph type="sldNum" sz="quarter" idx="5"/>
+          </p:nvPr>
+        </p:nvSpPr>
+        <p:spPr/>
+        <p:txBody>
+          <a:bodyPr/>
+          <a:lstStyle/>
+          <a:p>
+            <a:fld id="{EC64C357-1E42-9544-917F-BF79F3E6876F}" type="slidenum">
+              <a:rPr lang="en-RU" smtClean="0"/>
+              <a:t>5</a:t>
+            </a:fld>
+            <a:endParaRPr lang="en-RU"/>
+          </a:p>
+        </p:txBody>
+      </p:sp>
+    </p:spTree>
+    <p:extLst>
+      <p:ext uri="{BB962C8B-B14F-4D97-AF65-F5344CB8AC3E}">
+        <p14:creationId xmlns:p14="http://schemas.microsoft.com/office/powerpoint/2010/main" val="1757837968"/>
+      </p:ext>
+    </p:extLst>
+  </p:cSld>
+  <p:clrMapOvr>
+    <a:masterClrMapping/>
+  </p:clrMapOvr>
+</p:notes>
+</file>
+
+<file path=ppt/notesSlides/notesSlide6.xml><?xml version="1.0" encoding="utf-8"?>
+<p:notes xmlns:a="http://schemas.openxmlformats.org/drawingml/2006/main" xmlns:r="http://schemas.openxmlformats.org/officeDocument/2006/relationships" xmlns:p="http://schemas.openxmlformats.org/presentationml/2006/main">
+  <p:cSld>
+    <p:spTree>
+      <p:nvGrpSpPr>
+        <p:cNvPr id="1" name=""/>
+        <p:cNvGrpSpPr/>
+        <p:nvPr/>
+      </p:nvGrpSpPr>
+      <p:grpSpPr>
+        <a:xfrm>
+          <a:off x="0" y="0"/>
+          <a:ext cx="0" cy="0"/>
+          <a:chOff x="0" y="0"/>
+          <a:chExt cx="0" cy="0"/>
+        </a:xfrm>
+      </p:grpSpPr>
+      <p:sp>
+        <p:nvSpPr>
+          <p:cNvPr id="2" name="Slide Image Placeholder 1"/>
+          <p:cNvSpPr>
+            <a:spLocks noGrp="1" noRot="1" noChangeAspect="1"/>
+          </p:cNvSpPr>
+          <p:nvPr>
+            <p:ph type="sldImg"/>
+          </p:nvPr>
+        </p:nvSpPr>
+        <p:spPr/>
+      </p:sp>
+      <p:sp>
+        <p:nvSpPr>
+          <p:cNvPr id="3" name="Notes Placeholder 2"/>
+          <p:cNvSpPr>
+            <a:spLocks noGrp="1"/>
+          </p:cNvSpPr>
+          <p:nvPr>
+            <p:ph type="body" idx="1"/>
+          </p:nvPr>
+        </p:nvSpPr>
+        <p:spPr/>
+        <p:txBody>
+          <a:bodyPr/>
+          <a:lstStyle/>
+          <a:p>
+            <a:r>
+              <a:rPr lang="ru-RU" dirty="0"/>
+              <a:t>Чтобы внедрить модуль на всех 40 точках сети, нужно пройти три шага, один из которых уже завершен. На следующем шаге мы масштабируем пилот в сезон на еще 5-7 точках, чтобы проверить, как система справится с высокой нагрузкой в компании. После успешного сезонного пилота мы раскатываем модуль на все 40 точек сети.</a:t>
+            </a:r>
+          </a:p>
+          <a:p>
+            <a:r>
+              <a:rPr lang="ru-RU" dirty="0"/>
+              <a:t>Развертывание модуля на каждом этапе занимает три недели. Первая неделя - настройка: подключаем модуль к данным точки, переносим правила. Вторая и третья – переобучение бригадиров. А дальше можно работать: график собирается, мы следим за метриками. Останавливать работу ресторана не придется.</a:t>
+            </a:r>
+          </a:p>
+          <a:p>
+            <a:endParaRPr lang="en-RU" dirty="0"/>
+          </a:p>
+        </p:txBody>
+      </p:sp>
+      <p:sp>
+        <p:nvSpPr>
+          <p:cNvPr id="4" name="Slide Number Placeholder 3"/>
+          <p:cNvSpPr>
+            <a:spLocks noGrp="1"/>
+          </p:cNvSpPr>
+          <p:nvPr>
+            <p:ph type="sldNum" sz="quarter" idx="5"/>
+          </p:nvPr>
+        </p:nvSpPr>
+        <p:spPr/>
+        <p:txBody>
+          <a:bodyPr/>
+          <a:lstStyle/>
+          <a:p>
+            <a:fld id="{EC64C357-1E42-9544-917F-BF79F3E6876F}" type="slidenum">
+              <a:rPr lang="en-RU" smtClean="0"/>
+              <a:t>6</a:t>
+            </a:fld>
+            <a:endParaRPr lang="en-RU"/>
+          </a:p>
+        </p:txBody>
+      </p:sp>
+    </p:spTree>
+    <p:extLst>
+      <p:ext uri="{BB962C8B-B14F-4D97-AF65-F5344CB8AC3E}">
+        <p14:creationId xmlns:p14="http://schemas.microsoft.com/office/powerpoint/2010/main" val="4200072775"/>
+      </p:ext>
+    </p:extLst>
+  </p:cSld>
+  <p:clrMapOvr>
+    <a:masterClrMapping/>
+  </p:clrMapOvr>
+</p:notes>
+</file>
+
+<file path=ppt/notesSlides/notesSlide7.xml><?xml version="1.0" encoding="utf-8"?>
+<p:notes xmlns:a="http://schemas.openxmlformats.org/drawingml/2006/main" xmlns:r="http://schemas.openxmlformats.org/officeDocument/2006/relationships" xmlns:p="http://schemas.openxmlformats.org/presentationml/2006/main">
+  <p:cSld>
+    <p:spTree>
+      <p:nvGrpSpPr>
+        <p:cNvPr id="1" name=""/>
+        <p:cNvGrpSpPr/>
+        <p:nvPr/>
+      </p:nvGrpSpPr>
+      <p:grpSpPr>
+        <a:xfrm>
+          <a:off x="0" y="0"/>
+          <a:ext cx="0" cy="0"/>
+          <a:chOff x="0" y="0"/>
+          <a:chExt cx="0" cy="0"/>
+        </a:xfrm>
+      </p:grpSpPr>
+      <p:sp>
+        <p:nvSpPr>
+          <p:cNvPr id="2" name="Slide Image Placeholder 1"/>
+          <p:cNvSpPr>
+            <a:spLocks noGrp="1" noRot="1" noChangeAspect="1"/>
+          </p:cNvSpPr>
+          <p:nvPr>
+            <p:ph type="sldImg"/>
+          </p:nvPr>
+        </p:nvSpPr>
+        <p:spPr/>
+      </p:sp>
+      <p:sp>
+        <p:nvSpPr>
+          <p:cNvPr id="3" name="Notes Placeholder 2"/>
+          <p:cNvSpPr>
+            <a:spLocks noGrp="1"/>
+          </p:cNvSpPr>
+          <p:nvPr>
+            <p:ph type="body" idx="1"/>
+          </p:nvPr>
+        </p:nvSpPr>
+        <p:spPr/>
+        <p:txBody>
+          <a:bodyPr/>
+          <a:lstStyle/>
+          <a:p>
+            <a:r>
+              <a:rPr lang="ru-RU" dirty="0"/>
+              <a:t>Теперь расскажу, какой эффект сразу будет виден в деньгах, и какие есть риски.</a:t>
+            </a:r>
+          </a:p>
+          <a:p>
+            <a:r>
+              <a:rPr lang="ru-RU" dirty="0"/>
+              <a:t>Эффект при масштабировании на все 40 точек – порядка 2,1 млн руб. экономии на переработках в квартал. Это оценка по данным пилота - в зависимости от сложности графика на других точках и сезона итоговое число может меняться, но одно ясно точно – экономия будет существенная, и может даже увеличиться, когда все сотрудники привыкнут к новой системе.</a:t>
+            </a:r>
+          </a:p>
+          <a:p>
+            <a:r>
+              <a:rPr lang="ru-RU" dirty="0"/>
+              <a:t>Сразу обозначим риски и как мы будем с ними бороться.</a:t>
+            </a:r>
+            <a:br>
+              <a:rPr lang="ru-RU" dirty="0"/>
+            </a:br>
+            <a:r>
+              <a:rPr lang="ru-RU" dirty="0"/>
+              <a:t>Первый: на других точках эффект может быть ниже. Если на других точках переработки все равно будут выше 8% в первый месяц, то мы не будем раскатываем дальше, а определим причину и откорректируем настройки.</a:t>
+            </a:r>
+            <a:br>
+              <a:rPr lang="ru-RU" dirty="0"/>
+            </a:br>
+            <a:r>
+              <a:rPr lang="ru-RU" dirty="0"/>
+              <a:t>Второй: высокий сезон может сломать расписание. Если бригадиры правят график вручную чаще двух раз в неделю, значит, нужно </a:t>
+            </a:r>
+            <a:r>
+              <a:rPr lang="ru-RU" dirty="0" err="1"/>
+              <a:t>донастраивать</a:t>
+            </a:r>
+            <a:r>
+              <a:rPr lang="ru-RU" dirty="0"/>
+              <a:t> модуль под новый уровень нагрузки. Именно поэтому мы сначала проведем сезонный пилот и </a:t>
+            </a:r>
+            <a:r>
+              <a:rPr lang="ru-RU" dirty="0" err="1"/>
+              <a:t>донастроим</a:t>
+            </a:r>
+            <a:r>
+              <a:rPr lang="ru-RU" dirty="0"/>
+              <a:t> систему, и только потом будем масштабировать ее на все точки.</a:t>
+            </a:r>
+            <a:br>
+              <a:rPr lang="ru-RU" dirty="0"/>
+            </a:br>
+            <a:r>
+              <a:rPr lang="ru-RU" dirty="0"/>
+              <a:t>Риск третий: бригадиры не освоят модуль. Если бригадиры все равно будут тратить больше часа на сборку графика, а сотрудники точки будут жаловаться, мы выделим еще две недели на обучение. Техническая поддержка будет доступна пользователям в любом случае.</a:t>
+            </a:r>
+          </a:p>
+        </p:txBody>
+      </p:sp>
+      <p:sp>
+        <p:nvSpPr>
+          <p:cNvPr id="4" name="Slide Number Placeholder 3"/>
+          <p:cNvSpPr>
+            <a:spLocks noGrp="1"/>
+          </p:cNvSpPr>
+          <p:nvPr>
+            <p:ph type="sldNum" sz="quarter" idx="5"/>
+          </p:nvPr>
+        </p:nvSpPr>
+        <p:spPr/>
+        <p:txBody>
+          <a:bodyPr/>
+          <a:lstStyle/>
+          <a:p>
+            <a:fld id="{EC64C357-1E42-9544-917F-BF79F3E6876F}" type="slidenum">
+              <a:rPr lang="en-RU" smtClean="0"/>
+              <a:t>7</a:t>
+            </a:fld>
+            <a:endParaRPr lang="en-RU"/>
+          </a:p>
+        </p:txBody>
+      </p:sp>
+    </p:spTree>
+    <p:extLst>
+      <p:ext uri="{BB962C8B-B14F-4D97-AF65-F5344CB8AC3E}">
+        <p14:creationId xmlns:p14="http://schemas.microsoft.com/office/powerpoint/2010/main" val="1050462958"/>
+      </p:ext>
+    </p:extLst>
+  </p:cSld>
+  <p:clrMapOvr>
+    <a:masterClrMapping/>
+  </p:clrMapOvr>
+</p:notes>
+</file>
+
+<file path=ppt/notesSlides/notesSlide8.xml><?xml version="1.0" encoding="utf-8"?>
+<p:notes xmlns:a="http://schemas.openxmlformats.org/drawingml/2006/main" xmlns:r="http://schemas.openxmlformats.org/officeDocument/2006/relationships" xmlns:p="http://schemas.openxmlformats.org/presentationml/2006/main">
+  <p:cSld>
+    <p:spTree>
+      <p:nvGrpSpPr>
+        <p:cNvPr id="1" name=""/>
+        <p:cNvGrpSpPr/>
+        <p:nvPr/>
+      </p:nvGrpSpPr>
+      <p:grpSpPr>
+        <a:xfrm>
+          <a:off x="0" y="0"/>
+          <a:ext cx="0" cy="0"/>
+          <a:chOff x="0" y="0"/>
+          <a:chExt cx="0" cy="0"/>
+        </a:xfrm>
+      </p:grpSpPr>
+      <p:sp>
+        <p:nvSpPr>
+          <p:cNvPr id="2" name="Slide Image Placeholder 1"/>
+          <p:cNvSpPr>
+            <a:spLocks noGrp="1" noRot="1" noChangeAspect="1"/>
+          </p:cNvSpPr>
+          <p:nvPr>
+            <p:ph type="sldImg"/>
+          </p:nvPr>
+        </p:nvSpPr>
+        <p:spPr/>
+      </p:sp>
+      <p:sp>
+        <p:nvSpPr>
+          <p:cNvPr id="3" name="Notes Placeholder 2"/>
+          <p:cNvSpPr>
+            <a:spLocks noGrp="1"/>
+          </p:cNvSpPr>
+          <p:nvPr>
+            <p:ph type="body" idx="1"/>
+          </p:nvPr>
+        </p:nvSpPr>
+        <p:spPr/>
+        <p:txBody>
+          <a:bodyPr/>
+          <a:lstStyle/>
+          <a:p>
+            <a:r>
+              <a:rPr lang="ru-RU" dirty="0"/>
+              <a:t>Прошу Вас принять два решения до конца квартала. Первое: согласовать сезонный пилот на 5-7 точках в высокий сезон. Второе: выделить бригадиров этих точек на переобучение. Обучение занимает две недели.</a:t>
+            </a:r>
+          </a:p>
+          <a:p>
+            <a:r>
+              <a:rPr lang="ru-RU" dirty="0"/>
+              <a:t>Это не необратимое решение: если сезонный пилот не подтвердит цифры, мы остановим масштабирование. Сразу после согласования в течение недели мы настроим модуль на выбранных точках и запустим замер. Через квартал вернемся с результатами, теперь включая качество обслуживания гостей, которое в первом пилоте мы не измеряли.</a:t>
+            </a:r>
+          </a:p>
+        </p:txBody>
+      </p:sp>
+      <p:sp>
+        <p:nvSpPr>
+          <p:cNvPr id="4" name="Slide Number Placeholder 3"/>
+          <p:cNvSpPr>
+            <a:spLocks noGrp="1"/>
+          </p:cNvSpPr>
+          <p:nvPr>
+            <p:ph type="sldNum" sz="quarter" idx="5"/>
+          </p:nvPr>
+        </p:nvSpPr>
+        <p:spPr/>
+        <p:txBody>
+          <a:bodyPr/>
+          <a:lstStyle/>
+          <a:p>
+            <a:fld id="{EC64C357-1E42-9544-917F-BF79F3E6876F}" type="slidenum">
+              <a:rPr lang="en-RU" smtClean="0"/>
+              <a:t>8</a:t>
+            </a:fld>
+            <a:endParaRPr lang="en-RU"/>
+          </a:p>
+        </p:txBody>
+      </p:sp>
+    </p:spTree>
+    <p:extLst>
+      <p:ext uri="{BB962C8B-B14F-4D97-AF65-F5344CB8AC3E}">
+        <p14:creationId xmlns:p14="http://schemas.microsoft.com/office/powerpoint/2010/main" val="4115360258"/>
+      </p:ext>
+    </p:extLst>
+  </p:cSld>
+  <p:clrMapOvr>
+    <a:masterClrMapping/>
+  </p:clrMapOvr>
+</p:notes>
+</file>
+
+<file path=ppt/notesSlides/notesSlide9.xml><?xml version="1.0" encoding="utf-8"?>
+<p:notes xmlns:a="http://schemas.openxmlformats.org/drawingml/2006/main" xmlns:r="http://schemas.openxmlformats.org/officeDocument/2006/relationships" xmlns:p="http://schemas.openxmlformats.org/presentationml/2006/main">
+  <p:cSld>
+    <p:spTree>
+      <p:nvGrpSpPr>
+        <p:cNvPr id="1" name=""/>
+        <p:cNvGrpSpPr/>
+        <p:nvPr/>
+      </p:nvGrpSpPr>
+      <p:grpSpPr>
+        <a:xfrm>
+          <a:off x="0" y="0"/>
+          <a:ext cx="0" cy="0"/>
+          <a:chOff x="0" y="0"/>
+          <a:chExt cx="0" cy="0"/>
+        </a:xfrm>
+      </p:grpSpPr>
+      <p:sp>
+        <p:nvSpPr>
+          <p:cNvPr id="2" name="Slide Image Placeholder 1"/>
+          <p:cNvSpPr>
+            <a:spLocks noGrp="1" noRot="1" noChangeAspect="1"/>
+          </p:cNvSpPr>
+          <p:nvPr>
+            <p:ph type="sldImg"/>
+          </p:nvPr>
+        </p:nvSpPr>
+        <p:spPr/>
+      </p:sp>
+      <p:sp>
+        <p:nvSpPr>
+          <p:cNvPr id="3" name="Notes Placeholder 2"/>
+          <p:cNvSpPr>
+            <a:spLocks noGrp="1"/>
+          </p:cNvSpPr>
+          <p:nvPr>
+            <p:ph type="body" idx="1"/>
+          </p:nvPr>
+        </p:nvSpPr>
+        <p:spPr/>
+        <p:txBody>
+          <a:bodyPr/>
+          <a:lstStyle/>
+          <a:p>
+            <a:pPr marL="0" marR="0" lvl="0" indent="0" algn="l" defTabSz="914400" rtl="0" eaLnBrk="1" fontAlgn="auto" latinLnBrk="0" hangingPunct="1">
+              <a:lnSpc>
+                <a:spcPct val="100000"/>
+              </a:lnSpc>
+              <a:spcBef>
+                <a:spcPts val="0"/>
+              </a:spcBef>
+              <a:spcAft>
+                <a:spcPts val="0"/>
+              </a:spcAft>
+              <a:buClrTx/>
+              <a:buSzTx/>
+              <a:buFontTx/>
+              <a:buNone/>
+              <a:tabLst/>
+              <a:defRPr/>
+            </a:pPr>
+            <a:r>
+              <a:rPr lang="ru-RU" dirty="0"/>
+              <a:t>Готова ответить на все Ваши вопросы. Если мне будет не хватать под рукой каких-то данных, подготовлю письменный ответ и отправлю на почту в течение дня.</a:t>
+            </a:r>
+          </a:p>
+        </p:txBody>
+      </p:sp>
+      <p:sp>
+        <p:nvSpPr>
+          <p:cNvPr id="4" name="Slide Number Placeholder 3"/>
+          <p:cNvSpPr>
+            <a:spLocks noGrp="1"/>
+          </p:cNvSpPr>
+          <p:nvPr>
+            <p:ph type="sldNum" sz="quarter" idx="5"/>
+          </p:nvPr>
+        </p:nvSpPr>
+        <p:spPr/>
+        <p:txBody>
+          <a:bodyPr/>
+          <a:lstStyle/>
+          <a:p>
+            <a:fld id="{EC64C357-1E42-9544-917F-BF79F3E6876F}" type="slidenum">
+              <a:rPr lang="en-RU" smtClean="0"/>
+              <a:t>9</a:t>
+            </a:fld>
+            <a:endParaRPr lang="en-RU"/>
+          </a:p>
+        </p:txBody>
+      </p:sp>
+    </p:spTree>
+    <p:extLst>
+      <p:ext uri="{BB962C8B-B14F-4D97-AF65-F5344CB8AC3E}">
+        <p14:creationId xmlns:p14="http://schemas.microsoft.com/office/powerpoint/2010/main" val="1909865335"/>
+      </p:ext>
+    </p:extLst>
+  </p:cSld>
+  <p:clrMapOvr>
+    <a:masterClrMapping/>
+  </p:clrMapOvr>
+</p:notes>
 </file>
 
 <file path=ppt/slideLayouts/slideLayout1.xml><?xml version="1.0" encoding="utf-8"?>
@@ -1884,7 +3205,7 @@
         </p:nvSpPr>
         <p:spPr>
           <a:xfrm>
-            <a:off x="10820400" y="6502400"/>
+            <a:off x="11372241" y="228600"/>
             <a:ext cx="558800" cy="203200"/>
           </a:xfrm>
           <a:prstGeom prst="rect">
@@ -2535,13 +3856,19 @@
       </p:sp>
       <p:sp>
         <p:nvSpPr>
-          <p:cNvPr id="11" name="footer-right"/>
+          <p:cNvPr id="12" name="footer-right">
+            <a:extLst>
+              <a:ext uri="{FF2B5EF4-FFF2-40B4-BE49-F238E27FC236}">
+                <a16:creationId xmlns:a16="http://schemas.microsoft.com/office/drawing/2014/main" id="{BB7A3AFC-EDEA-E6EA-6DE1-1EE7A7D20D3F}"/>
+              </a:ext>
+            </a:extLst>
+          </p:cNvPr>
           <p:cNvSpPr txBox="1"/>
           <p:nvPr/>
         </p:nvSpPr>
         <p:spPr>
           <a:xfrm>
-            <a:off x="10820400" y="6502400"/>
+            <a:off x="11372241" y="228600"/>
             <a:ext cx="558800" cy="203200"/>
           </a:xfrm>
           <a:prstGeom prst="rect">
@@ -2774,7 +4101,7 @@
         </p:xfrm>
         <a:graphic>
           <a:graphicData uri="http://schemas.openxmlformats.org/drawingml/2006/chart">
-            <c:chart xmlns:c="http://schemas.openxmlformats.org/drawingml/2006/chart" xmlns:r="http://schemas.openxmlformats.org/officeDocument/2006/relationships" r:id="rId2"/>
+            <c:chart xmlns:c="http://schemas.openxmlformats.org/drawingml/2006/chart" xmlns:r="http://schemas.openxmlformats.org/officeDocument/2006/relationships" r:id="rId3"/>
           </a:graphicData>
         </a:graphic>
       </p:graphicFrame>
@@ -2841,7 +4168,7 @@
         </p:xfrm>
         <a:graphic>
           <a:graphicData uri="http://schemas.openxmlformats.org/drawingml/2006/chart">
-            <c:chart xmlns:c="http://schemas.openxmlformats.org/drawingml/2006/chart" xmlns:r="http://schemas.openxmlformats.org/officeDocument/2006/relationships" r:id="rId3"/>
+            <c:chart xmlns:c="http://schemas.openxmlformats.org/drawingml/2006/chart" xmlns:r="http://schemas.openxmlformats.org/officeDocument/2006/relationships" r:id="rId4"/>
           </a:graphicData>
         </a:graphic>
       </p:graphicFrame>
@@ -2986,6 +4313,47 @@
         <p:spPr>
           <a:xfrm>
             <a:off x="10820400" y="6502400"/>
+            <a:ext cx="558800" cy="203200"/>
+          </a:xfrm>
+          <a:prstGeom prst="rect">
+            <a:avLst/>
+          </a:prstGeom>
+          <a:noFill/>
+          <a:ln>
+            <a:noFill/>
+          </a:ln>
+        </p:spPr>
+        <p:txBody>
+          <a:bodyPr wrap="none" lIns="0" tIns="0" rIns="0" bIns="0" rtlCol="0" anchor="t"/>
+          <a:lstStyle/>
+          <a:p>
+            <a:pPr algn="r">
+              <a:lnSpc>
+                <a:spcPct val="120000"/>
+              </a:lnSpc>
+            </a:pPr>
+            <a:endParaRPr lang="en-US" sz="1000" noProof="1">
+              <a:latin typeface="Inter" panose="02000503000000020004" pitchFamily="2" charset="0"/>
+              <a:ea typeface="Inter" panose="02000503000000020004" pitchFamily="2" charset="0"/>
+            </a:endParaRPr>
+          </a:p>
+        </p:txBody>
+      </p:sp>
+      <p:sp>
+        <p:nvSpPr>
+          <p:cNvPr id="10" name="footer-right">
+            <a:extLst>
+              <a:ext uri="{FF2B5EF4-FFF2-40B4-BE49-F238E27FC236}">
+                <a16:creationId xmlns:a16="http://schemas.microsoft.com/office/drawing/2014/main" id="{5E2F8130-57CF-180C-1E87-1107E77DA741}"/>
+              </a:ext>
+            </a:extLst>
+          </p:cNvPr>
+          <p:cNvSpPr txBox="1"/>
+          <p:nvPr/>
+        </p:nvSpPr>
+        <p:spPr>
+          <a:xfrm>
+            <a:off x="11372241" y="228600"/>
             <a:ext cx="558800" cy="203200"/>
           </a:xfrm>
           <a:prstGeom prst="rect">
@@ -3342,7 +4710,7 @@
           <p:nvPr>
             <p:extLst>
               <p:ext uri="{F5677B7D-0D2A-4D9B-9A5C-6D8D7D0E5A5D}">
-                <pptd:icon xmlns:pptd="https://kimi-design.msh.team/pptd/2026" xmlns:mc="http://schemas.openxmlformats.org/markup-compatibility/2006" xmlns:m="http://schemas.openxmlformats.org/officeDocument/2006/math" xmlns:cx="http://schemas.microsoft.com/office/drawing/2014/chartex" xmlns:c="http://schemas.openxmlformats.org/drawingml/2006/chart" xmlns:a14="http://schemas.microsoft.com/office/drawing/2010/main" xmlns="" encoding="base64url">eyJpY29uTmFtZSI6ImZhczpjYWxlbmRhci1jaGVjayJ9</pptd:icon>
+                <pptd:icon xmlns="" xmlns:a14="http://schemas.microsoft.com/office/drawing/2010/main" xmlns:c="http://schemas.openxmlformats.org/drawingml/2006/chart" xmlns:cx="http://schemas.microsoft.com/office/drawing/2014/chartex" xmlns:m="http://schemas.openxmlformats.org/officeDocument/2006/math" xmlns:mc="http://schemas.openxmlformats.org/markup-compatibility/2006" xmlns:pptd="https://kimi-design.msh.team/pptd/2026" encoding="base64url">eyJpY29uTmFtZSI6ImZhczpjYWxlbmRhci1jaGVjayJ9</pptd:icon>
               </p:ext>
             </p:extLst>
           </p:nvPr>
@@ -3609,7 +4977,7 @@
           <p:nvPr>
             <p:extLst>
               <p:ext uri="{F5677B7D-0D2A-4D9B-9A5C-6D8D7D0E5A5D}">
-                <pptd:icon xmlns:pptd="https://kimi-design.msh.team/pptd/2026" xmlns:mc="http://schemas.openxmlformats.org/markup-compatibility/2006" xmlns:m="http://schemas.openxmlformats.org/officeDocument/2006/math" xmlns:cx="http://schemas.microsoft.com/office/drawing/2014/chartex" xmlns:c="http://schemas.openxmlformats.org/drawingml/2006/chart" xmlns:a14="http://schemas.microsoft.com/office/drawing/2010/main" xmlns="" encoding="base64url">eyJpY29uTmFtZSI6ImZhczp1c2VyLWNoZWNrIn0</pptd:icon>
+                <pptd:icon xmlns="" xmlns:a14="http://schemas.microsoft.com/office/drawing/2010/main" xmlns:c="http://schemas.openxmlformats.org/drawingml/2006/chart" xmlns:cx="http://schemas.microsoft.com/office/drawing/2014/chartex" xmlns:m="http://schemas.openxmlformats.org/officeDocument/2006/math" xmlns:mc="http://schemas.openxmlformats.org/markup-compatibility/2006" xmlns:pptd="https://kimi-design.msh.team/pptd/2026" encoding="base64url">eyJpY29uTmFtZSI6ImZhczp1c2VyLWNoZWNrIn0</pptd:icon>
               </p:ext>
             </p:extLst>
           </p:nvPr>
@@ -3920,7 +5288,7 @@
           <p:nvPr>
             <p:extLst>
               <p:ext uri="{F5677B7D-0D2A-4D9B-9A5C-6D8D7D0E5A5D}">
-                <pptd:icon xmlns:pptd="https://kimi-design.msh.team/pptd/2026" xmlns:mc="http://schemas.openxmlformats.org/markup-compatibility/2006" xmlns:m="http://schemas.openxmlformats.org/officeDocument/2006/math" xmlns:cx="http://schemas.microsoft.com/office/drawing/2014/chartex" xmlns:c="http://schemas.openxmlformats.org/drawingml/2006/chart" xmlns:a14="http://schemas.microsoft.com/office/drawing/2010/main" xmlns="" encoding="base64url">eyJpY29uTmFtZSI6ImZhczpjaGFydC1saW5lIn0</pptd:icon>
+                <pptd:icon xmlns="" xmlns:a14="http://schemas.microsoft.com/office/drawing/2010/main" xmlns:c="http://schemas.openxmlformats.org/drawingml/2006/chart" xmlns:cx="http://schemas.microsoft.com/office/drawing/2014/chartex" xmlns:m="http://schemas.openxmlformats.org/officeDocument/2006/math" xmlns:mc="http://schemas.openxmlformats.org/markup-compatibility/2006" xmlns:pptd="https://kimi-design.msh.team/pptd/2026" encoding="base64url">eyJpY29uTmFtZSI6ImZhczpjaGFydC1saW5lIn0</pptd:icon>
               </p:ext>
             </p:extLst>
           </p:nvPr>
@@ -4280,13 +5648,19 @@
       </p:sp>
       <p:sp>
         <p:nvSpPr>
-          <p:cNvPr id="14" name="footer-right"/>
+          <p:cNvPr id="15" name="footer-right">
+            <a:extLst>
+              <a:ext uri="{FF2B5EF4-FFF2-40B4-BE49-F238E27FC236}">
+                <a16:creationId xmlns:a16="http://schemas.microsoft.com/office/drawing/2014/main" id="{C58E9668-5380-AD51-4C3D-C26CCA808564}"/>
+              </a:ext>
+            </a:extLst>
+          </p:cNvPr>
           <p:cNvSpPr txBox="1"/>
           <p:nvPr/>
         </p:nvSpPr>
         <p:spPr>
           <a:xfrm>
-            <a:off x="10820400" y="6502400"/>
+            <a:off x="11372241" y="228600"/>
             <a:ext cx="558800" cy="203200"/>
           </a:xfrm>
           <a:prstGeom prst="rect">
@@ -5193,13 +6567,19 @@
       </p:sp>
       <p:sp>
         <p:nvSpPr>
-          <p:cNvPr id="15" name="footer-right"/>
+          <p:cNvPr id="16" name="footer-right">
+            <a:extLst>
+              <a:ext uri="{FF2B5EF4-FFF2-40B4-BE49-F238E27FC236}">
+                <a16:creationId xmlns:a16="http://schemas.microsoft.com/office/drawing/2014/main" id="{79FE515F-CD8C-BE3B-0713-F9D2EC3C42C1}"/>
+              </a:ext>
+            </a:extLst>
+          </p:cNvPr>
           <p:cNvSpPr txBox="1"/>
           <p:nvPr/>
         </p:nvSpPr>
         <p:spPr>
           <a:xfrm>
-            <a:off x="10820400" y="6502400"/>
+            <a:off x="11372241" y="228600"/>
             <a:ext cx="558800" cy="203200"/>
           </a:xfrm>
           <a:prstGeom prst="rect">
@@ -6304,13 +7684,19 @@
       </p:sp>
       <p:sp>
         <p:nvSpPr>
-          <p:cNvPr id="14" name="footer-right"/>
+          <p:cNvPr id="15" name="footer-right">
+            <a:extLst>
+              <a:ext uri="{FF2B5EF4-FFF2-40B4-BE49-F238E27FC236}">
+                <a16:creationId xmlns:a16="http://schemas.microsoft.com/office/drawing/2014/main" id="{108094CA-7B2A-524A-1E31-2987D19C5C10}"/>
+              </a:ext>
+            </a:extLst>
+          </p:cNvPr>
           <p:cNvSpPr txBox="1"/>
           <p:nvPr/>
         </p:nvSpPr>
         <p:spPr>
           <a:xfrm>
-            <a:off x="10820400" y="6502400"/>
+            <a:off x="11372241" y="228600"/>
             <a:ext cx="558800" cy="203200"/>
           </a:xfrm>
           <a:prstGeom prst="rect">
@@ -7096,13 +8482,19 @@
       </p:sp>
       <p:sp>
         <p:nvSpPr>
-          <p:cNvPr id="12" name="footer-right"/>
+          <p:cNvPr id="13" name="footer-right">
+            <a:extLst>
+              <a:ext uri="{FF2B5EF4-FFF2-40B4-BE49-F238E27FC236}">
+                <a16:creationId xmlns:a16="http://schemas.microsoft.com/office/drawing/2014/main" id="{44788539-491D-E8EB-77F2-C83C2E062866}"/>
+              </a:ext>
+            </a:extLst>
+          </p:cNvPr>
           <p:cNvSpPr txBox="1"/>
           <p:nvPr/>
         </p:nvSpPr>
         <p:spPr>
           <a:xfrm>
-            <a:off x="10820400" y="6502400"/>
+            <a:off x="11372241" y="228600"/>
             <a:ext cx="558800" cy="203200"/>
           </a:xfrm>
           <a:prstGeom prst="rect">
@@ -7476,4 +8868,299 @@
   <a:objectDefaults/>
   <a:extraClrSchemeLst/>
 </a:theme>
+</file>
+
+<file path=ppt/theme/theme2.xml><?xml version="1.0" encoding="utf-8"?>
+<a:theme xmlns:a="http://schemas.openxmlformats.org/drawingml/2006/main" name="Office Theme">
+  <a:themeElements>
+    <a:clrScheme name="Office">
+      <a:dk1>
+        <a:sysClr val="windowText" lastClr="000000"/>
+      </a:dk1>
+      <a:lt1>
+        <a:sysClr val="window" lastClr="FFFFFF"/>
+      </a:lt1>
+      <a:dk2>
+        <a:srgbClr val="44546A"/>
+      </a:dk2>
+      <a:lt2>
+        <a:srgbClr val="E7E6E6"/>
+      </a:lt2>
+      <a:accent1>
+        <a:srgbClr val="4472C4"/>
+      </a:accent1>
+      <a:accent2>
+        <a:srgbClr val="ED7D31"/>
+      </a:accent2>
+      <a:accent3>
+        <a:srgbClr val="A5A5A5"/>
+      </a:accent3>
+      <a:accent4>
+        <a:srgbClr val="FFC000"/>
+      </a:accent4>
+      <a:accent5>
+        <a:srgbClr val="5B9BD5"/>
+      </a:accent5>
+      <a:accent6>
+        <a:srgbClr val="70AD47"/>
+      </a:accent6>
+      <a:hlink>
+        <a:srgbClr val="0563C1"/>
+      </a:hlink>
+      <a:folHlink>
+        <a:srgbClr val="954F72"/>
+      </a:folHlink>
+    </a:clrScheme>
+    <a:fontScheme name="Office">
+      <a:majorFont>
+        <a:latin typeface="Calibri Light" panose="020F0302020204030204"/>
+        <a:ea typeface=""/>
+        <a:cs typeface=""/>
+        <a:font script="Jpan" typeface="游ゴシック Light"/>
+        <a:font script="Hang" typeface="맑은 고딕"/>
+        <a:font script="Hans" typeface="等线 Light"/>
+        <a:font script="Hant" typeface="新細明體"/>
+        <a:font script="Arab" typeface="Times New Roman"/>
+        <a:font script="Hebr" typeface="Times New Roman"/>
+        <a:font script="Thai" typeface="Angsana New"/>
+        <a:font script="Ethi" typeface="Nyala"/>
+        <a:font script="Beng" typeface="Vrinda"/>
+        <a:font script="Gujr" typeface="Shruti"/>
+        <a:font script="Khmr" typeface="MoolBoran"/>
+        <a:font script="Knda" typeface="Tunga"/>
+        <a:font script="Guru" typeface="Raavi"/>
+        <a:font script="Cans" typeface="Euphemia"/>
+        <a:font script="Cher" typeface="Plantagenet Cherokee"/>
+        <a:font script="Yiii" typeface="Microsoft Yi Baiti"/>
+        <a:font script="Tibt" typeface="Microsoft Himalaya"/>
+        <a:font script="Thaa" typeface="MV Boli"/>
+        <a:font script="Deva" typeface="Mangal"/>
+        <a:font script="Telu" typeface="Gautami"/>
+        <a:font script="Taml" typeface="Latha"/>
+        <a:font script="Syrc" typeface="Estrangelo Edessa"/>
+        <a:font script="Orya" typeface="Kalinga"/>
+        <a:font script="Mlym" typeface="Kartika"/>
+        <a:font script="Laoo" typeface="DokChampa"/>
+        <a:font script="Sinh" typeface="Iskoola Pota"/>
+        <a:font script="Mong" typeface="Mongolian Baiti"/>
+        <a:font script="Viet" typeface="Times New Roman"/>
+        <a:font script="Uigh" typeface="Microsoft Uighur"/>
+        <a:font script="Geor" typeface="Sylfaen"/>
+        <a:font script="Armn" typeface="Arial"/>
+        <a:font script="Bugi" typeface="Leelawadee UI"/>
+        <a:font script="Bopo" typeface="Microsoft JhengHei"/>
+        <a:font script="Java" typeface="Javanese Text"/>
+        <a:font script="Lisu" typeface="Segoe UI"/>
+        <a:font script="Mymr" typeface="Myanmar Text"/>
+        <a:font script="Nkoo" typeface="Ebrima"/>
+        <a:font script="Olck" typeface="Nirmala UI"/>
+        <a:font script="Osma" typeface="Ebrima"/>
+        <a:font script="Phag" typeface="Phagspa"/>
+        <a:font script="Syrn" typeface="Estrangelo Edessa"/>
+        <a:font script="Syrj" typeface="Estrangelo Edessa"/>
+        <a:font script="Syre" typeface="Estrangelo Edessa"/>
+        <a:font script="Sora" typeface="Nirmala UI"/>
+        <a:font script="Tale" typeface="Microsoft Tai Le"/>
+        <a:font script="Talu" typeface="Microsoft New Tai Lue"/>
+        <a:font script="Tfng" typeface="Ebrima"/>
+      </a:majorFont>
+      <a:minorFont>
+        <a:latin typeface="Calibri" panose="020F0502020204030204"/>
+        <a:ea typeface=""/>
+        <a:cs typeface=""/>
+        <a:font script="Jpan" typeface="游ゴシック"/>
+        <a:font script="Hang" typeface="맑은 고딕"/>
+        <a:font script="Hans" typeface="等线"/>
+        <a:font script="Hant" typeface="新細明體"/>
+        <a:font script="Arab" typeface="Arial"/>
+        <a:font script="Hebr" typeface="Arial"/>
+        <a:font script="Thai" typeface="Cordia New"/>
+        <a:font script="Ethi" typeface="Nyala"/>
+        <a:font script="Beng" typeface="Vrinda"/>
+        <a:font script="Gujr" typeface="Shruti"/>
+        <a:font script="Khmr" typeface="DaunPenh"/>
+        <a:font script="Knda" typeface="Tunga"/>
+        <a:font script="Guru" typeface="Raavi"/>
+        <a:font script="Cans" typeface="Euphemia"/>
+        <a:font script="Cher" typeface="Plantagenet Cherokee"/>
+        <a:font script="Yiii" typeface="Microsoft Yi Baiti"/>
+        <a:font script="Tibt" typeface="Microsoft Himalaya"/>
+        <a:font script="Thaa" typeface="MV Boli"/>
+        <a:font script="Deva" typeface="Mangal"/>
+        <a:font script="Telu" typeface="Gautami"/>
+        <a:font script="Taml" typeface="Latha"/>
+        <a:font script="Syrc" typeface="Estrangelo Edessa"/>
+        <a:font script="Orya" typeface="Kalinga"/>
+        <a:font script="Mlym" typeface="Kartika"/>
+        <a:font script="Laoo" typeface="DokChampa"/>
+        <a:font script="Sinh" typeface="Iskoola Pota"/>
+        <a:font script="Mong" typeface="Mongolian Baiti"/>
+        <a:font script="Viet" typeface="Arial"/>
+        <a:font script="Uigh" typeface="Microsoft Uighur"/>
+        <a:font script="Geor" typeface="Sylfaen"/>
+        <a:font script="Armn" typeface="Arial"/>
+        <a:font script="Bugi" typeface="Leelawadee UI"/>
+        <a:font script="Bopo" typeface="Microsoft JhengHei"/>
+        <a:font script="Java" typeface="Javanese Text"/>
+        <a:font script="Lisu" typeface="Segoe UI"/>
+        <a:font script="Mymr" typeface="Myanmar Text"/>
+        <a:font script="Nkoo" typeface="Ebrima"/>
+        <a:font script="Olck" typeface="Nirmala UI"/>
+        <a:font script="Osma" typeface="Ebrima"/>
+        <a:font script="Phag" typeface="Phagspa"/>
+        <a:font script="Syrn" typeface="Estrangelo Edessa"/>
+        <a:font script="Syrj" typeface="Estrangelo Edessa"/>
+        <a:font script="Syre" typeface="Estrangelo Edessa"/>
+        <a:font script="Sora" typeface="Nirmala UI"/>
+        <a:font script="Tale" typeface="Microsoft Tai Le"/>
+        <a:font script="Talu" typeface="Microsoft New Tai Lue"/>
+        <a:font script="Tfng" typeface="Ebrima"/>
+      </a:minorFont>
+    </a:fontScheme>
+    <a:fmtScheme name="Office">
+      <a:fillStyleLst>
+        <a:solidFill>
+          <a:schemeClr val="phClr"/>
+        </a:solidFill>
+        <a:gradFill rotWithShape="1">
+          <a:gsLst>
+            <a:gs pos="0">
+              <a:schemeClr val="phClr">
+                <a:lumMod val="110000"/>
+                <a:satMod val="105000"/>
+                <a:tint val="67000"/>
+              </a:schemeClr>
+            </a:gs>
+            <a:gs pos="50000">
+              <a:schemeClr val="phClr">
+                <a:lumMod val="105000"/>
+                <a:satMod val="103000"/>
+                <a:tint val="73000"/>
+              </a:schemeClr>
+            </a:gs>
+            <a:gs pos="100000">
+              <a:schemeClr val="phClr">
+                <a:lumMod val="105000"/>
+                <a:satMod val="109000"/>
+                <a:tint val="81000"/>
+              </a:schemeClr>
+            </a:gs>
+          </a:gsLst>
+          <a:lin ang="5400000" scaled="0"/>
+        </a:gradFill>
+        <a:gradFill rotWithShape="1">
+          <a:gsLst>
+            <a:gs pos="0">
+              <a:schemeClr val="phClr">
+                <a:satMod val="103000"/>
+                <a:lumMod val="102000"/>
+                <a:tint val="94000"/>
+              </a:schemeClr>
+            </a:gs>
+            <a:gs pos="50000">
+              <a:schemeClr val="phClr">
+                <a:satMod val="110000"/>
+                <a:lumMod val="100000"/>
+                <a:shade val="100000"/>
+              </a:schemeClr>
+            </a:gs>
+            <a:gs pos="100000">
+              <a:schemeClr val="phClr">
+                <a:lumMod val="99000"/>
+                <a:satMod val="120000"/>
+                <a:shade val="78000"/>
+              </a:schemeClr>
+            </a:gs>
+          </a:gsLst>
+          <a:lin ang="5400000" scaled="0"/>
+        </a:gradFill>
+      </a:fillStyleLst>
+      <a:lnStyleLst>
+        <a:ln w="6350" cap="flat" cmpd="sng" algn="ctr">
+          <a:solidFill>
+            <a:schemeClr val="phClr"/>
+          </a:solidFill>
+          <a:prstDash val="solid"/>
+          <a:miter lim="800000"/>
+        </a:ln>
+        <a:ln w="12700" cap="flat" cmpd="sng" algn="ctr">
+          <a:solidFill>
+            <a:schemeClr val="phClr"/>
+          </a:solidFill>
+          <a:prstDash val="solid"/>
+          <a:miter lim="800000"/>
+        </a:ln>
+        <a:ln w="19050" cap="flat" cmpd="sng" algn="ctr">
+          <a:solidFill>
+            <a:schemeClr val="phClr"/>
+          </a:solidFill>
+          <a:prstDash val="solid"/>
+          <a:miter lim="800000"/>
+        </a:ln>
+      </a:lnStyleLst>
+      <a:effectStyleLst>
+        <a:effectStyle>
+          <a:effectLst/>
+        </a:effectStyle>
+        <a:effectStyle>
+          <a:effectLst/>
+        </a:effectStyle>
+        <a:effectStyle>
+          <a:effectLst>
+            <a:outerShdw blurRad="57150" dist="19050" dir="5400000" algn="ctr" rotWithShape="0">
+              <a:srgbClr val="000000">
+                <a:alpha val="63000"/>
+              </a:srgbClr>
+            </a:outerShdw>
+          </a:effectLst>
+        </a:effectStyle>
+      </a:effectStyleLst>
+      <a:bgFillStyleLst>
+        <a:solidFill>
+          <a:schemeClr val="phClr"/>
+        </a:solidFill>
+        <a:solidFill>
+          <a:schemeClr val="phClr">
+            <a:tint val="95000"/>
+            <a:satMod val="170000"/>
+          </a:schemeClr>
+        </a:solidFill>
+        <a:gradFill rotWithShape="1">
+          <a:gsLst>
+            <a:gs pos="0">
+              <a:schemeClr val="phClr">
+                <a:tint val="93000"/>
+                <a:satMod val="150000"/>
+                <a:shade val="98000"/>
+                <a:lumMod val="102000"/>
+              </a:schemeClr>
+            </a:gs>
+            <a:gs pos="50000">
+              <a:schemeClr val="phClr">
+                <a:tint val="98000"/>
+                <a:satMod val="130000"/>
+                <a:shade val="90000"/>
+                <a:lumMod val="103000"/>
+              </a:schemeClr>
+            </a:gs>
+            <a:gs pos="100000">
+              <a:schemeClr val="phClr">
+                <a:shade val="63000"/>
+                <a:satMod val="120000"/>
+              </a:schemeClr>
+            </a:gs>
+          </a:gsLst>
+          <a:lin ang="5400000" scaled="0"/>
+        </a:gradFill>
+      </a:bgFillStyleLst>
+    </a:fmtScheme>
+  </a:themeElements>
+  <a:objectDefaults/>
+  <a:extraClrSchemeLst/>
+  <a:extLst>
+    <a:ext uri="{05A4C25C-085E-4340-85A3-A5531E510DB2}">
+      <thm15:themeFamily xmlns:thm15="http://schemas.microsoft.com/office/thememl/2012/main" name="Office Theme" id="{62F939B6-93AF-4DB8-9C6B-D6C7DFDC589F}" vid="{4A3C46E8-61CC-4603-A589-7422A47A8E4A}"/>
+    </a:ext>
+  </a:extLst>
+</a:theme>
 </file>